--- a/docs/content/review/review_lecture.pptx
+++ b/docs/content/review/review_lecture.pptx
@@ -18,6 +18,22 @@
     <p:sldId id="266" r:id="rId12"/>
     <p:sldId id="267" r:id="rId13"/>
     <p:sldId id="268" r:id="rId14"/>
+    <p:sldId id="269" r:id="rId15"/>
+    <p:sldId id="270" r:id="rId16"/>
+    <p:sldId id="271" r:id="rId17"/>
+    <p:sldId id="272" r:id="rId18"/>
+    <p:sldId id="273" r:id="rId19"/>
+    <p:sldId id="274" r:id="rId20"/>
+    <p:sldId id="275" r:id="rId21"/>
+    <p:sldId id="276" r:id="rId22"/>
+    <p:sldId id="277" r:id="rId23"/>
+    <p:sldId id="278" r:id="rId24"/>
+    <p:sldId id="279" r:id="rId25"/>
+    <p:sldId id="280" r:id="rId26"/>
+    <p:sldId id="281" r:id="rId27"/>
+    <p:sldId id="282" r:id="rId28"/>
+    <p:sldId id="283" r:id="rId29"/>
+    <p:sldId id="284" r:id="rId30"/>
   </p:sldIdLst>
   <p:sldSz cx="9144000" cy="5143500" type="screen16x9"/>
   <p:notesSz cx="6858000" cy="9144000"/>
@@ -3305,7 +3321,7 @@
             </a:pPr>
             <a:r>
               <a:rPr/>
-              <a:t>Review</a:t>
+              <a:t>Lecture: Review</a:t>
             </a:r>
           </a:p>
         </p:txBody>
@@ -3393,113 +3409,7 @@
             </a:pPr>
             <a:r>
               <a:rPr/>
-              <a:t>Step 6: Making Predictions</a:t>
-            </a:r>
-          </a:p>
-        </p:txBody>
-      </p:sp>
-      <p:sp>
-        <p:nvSpPr>
-          <p:cNvPr id="3" name="Content Placeholder 2"/>
-          <p:cNvSpPr>
-            <a:spLocks noGrp="1"/>
-          </p:cNvSpPr>
-          <p:nvPr>
-            <p:ph idx="1"/>
-          </p:nvPr>
-        </p:nvSpPr>
-        <p:spPr/>
-        <p:txBody>
-          <a:bodyPr/>
-          <a:lstStyle/>
-          <a:p>
-            <a:pPr lvl="0" indent="0" marL="0">
-              <a:spcBef>
-                <a:spcPts val="3000"/>
-              </a:spcBef>
-              <a:buNone/>
-            </a:pPr>
-            <a:r>
-              <a:rPr b="1"/>
-              <a:t>Using the Model for Prediction</a:t>
-            </a:r>
-          </a:p>
-          <a:p>
-            <a:pPr lvl="0" indent="0" marL="0">
-              <a:buNone/>
-            </a:pPr>
-            <a:r>
-              <a:rPr/>
-              <a:t>Let’s predict the probability of sexual maturity for specific lizard sizes:</a:t>
-            </a:r>
-          </a:p>
-          <a:p>
-            <a:pPr lvl="0" indent="0">
-              <a:buNone/>
-            </a:pPr>
-            <a:r>
-              <a:rPr>
-                <a:latin typeface="Courier"/>
-              </a:rPr>
-              <a:t>        1 
-0.1565304 </a:t>
-            </a:r>
-          </a:p>
-          <a:p>
-            <a:pPr lvl="0" indent="0">
-              <a:buNone/>
-            </a:pPr>
-            <a:r>
-              <a:rPr>
-                <a:latin typeface="Courier"/>
-              </a:rPr>
-              <a:t>        1 
-0.6939292 </a:t>
-            </a:r>
-          </a:p>
-          <a:p>
-            <a:pPr lvl="0" indent="0">
-              <a:buNone/>
-            </a:pPr>
-            <a:r>
-              <a:rPr>
-                <a:latin typeface="Courier"/>
-              </a:rPr>
-              <a:t>        1 
-0.9651551 </a:t>
-            </a:r>
-          </a:p>
-          <a:p>
-            <a:pPr lvl="0" indent="0" marL="0">
-              <a:spcBef>
-                <a:spcPts val="3000"/>
-              </a:spcBef>
-              <a:buNone/>
-            </a:pPr>
-            <a:r>
-              <a:rPr b="1"/>
-              <a:t>Interpretation:</a:t>
-            </a:r>
-          </a:p>
-          <a:p>
-            <a:pPr lvl="0"/>
-            <a:r>
-              <a:rPr/>
-              <a:t>A 20 cm lizard has about 14% probability of being sexually mature</a:t>
-            </a:r>
-          </a:p>
-          <a:p>
-            <a:pPr lvl="0"/>
-            <a:r>
-              <a:rPr/>
-              <a:t>A 30 cm lizard has about 70% probability of being sexually mature</a:t>
-            </a:r>
-          </a:p>
-          <a:p>
-            <a:pPr lvl="0"/>
-            <a:r>
-              <a:rPr/>
-              <a:t>A 40 cm lizard has about 96% probability of being sexually mature</a:t>
+              <a:t>Step 3: Fit the Logistic Regression Model</a:t>
             </a:r>
           </a:p>
         </p:txBody>
@@ -3550,8 +3460,8 @@
               <a:buNone/>
             </a:pPr>
             <a:r>
-              <a:rPr/>
-              <a:t>Step 7: Model Fit Assessment</a:t>
+              <a:rPr b="1"/>
+              <a:t>Using glm() for Logistic Regression</a:t>
             </a:r>
           </a:p>
         </p:txBody>
@@ -3572,109 +3482,367 @@
           <a:lstStyle/>
           <a:p>
             <a:pPr lvl="0" indent="0" marL="0">
-              <a:spcBef>
-                <a:spcPts val="3000"/>
-              </a:spcBef>
               <a:buNone/>
             </a:pPr>
             <a:r>
-              <a:rPr b="1"/>
-              <a:t>Calculating Pseudo-R2 Values</a:t>
-            </a:r>
-          </a:p>
-          <a:p>
-            <a:pPr lvl="0" indent="0" marL="0">
+              <a:rPr/>
+              <a:t>The </a:t>
+            </a:r>
+            <a:r>
+              <a:rPr>
+                <a:latin typeface="Courier"/>
+              </a:rPr>
+              <a:t>glm()</a:t>
+            </a:r>
+            <a:r>
+              <a:rPr/>
+              <a:t> function is similar to </a:t>
+            </a:r>
+            <a:r>
+              <a:rPr>
+                <a:latin typeface="Courier"/>
+              </a:rPr>
+              <a:t>lm()</a:t>
+            </a:r>
+            <a:r>
+              <a:rPr/>
+              <a:t> but requires specifying the distribution family:</a:t>
+            </a:r>
+          </a:p>
+          <a:p>
+            <a:pPr lvl="0" indent="0">
               <a:buNone/>
             </a:pPr>
             <a:r>
-              <a:rPr/>
-              <a:t>Unlike linear regression, logistic regression doesn’t have a traditional R². We use pseudo-R² instead:</a:t>
-            </a:r>
-          </a:p>
-          <a:p>
-            <a:pPr lvl="0" indent="0">
-              <a:buNone/>
-            </a:pPr>
-            <a:r>
-              <a:rPr>
-                <a:latin typeface="Courier"/>
-              </a:rPr>
-              <a:t>fitting null model for pseudo-r2</a:t>
-            </a:r>
-          </a:p>
-          <a:p>
-            <a:pPr lvl="0" indent="0">
-              <a:buNone/>
-            </a:pPr>
-            <a:r>
-              <a:rPr>
-                <a:latin typeface="Courier"/>
-              </a:rPr>
-              <a:t>        llh     llhNull          G2    McFadden        r2ML        r2CU 
--17.0204762 -30.0881077  26.1352630   0.4343122   0.4478763   0.6009400 </a:t>
-            </a:r>
-          </a:p>
-          <a:p>
-            <a:pPr lvl="0" indent="0" marL="0">
-              <a:spcBef>
-                <a:spcPts val="3000"/>
-              </a:spcBef>
-              <a:buNone/>
-            </a:pPr>
-            <a:r>
-              <a:rPr b="1"/>
-              <a:t>Interpreting Pseudo-R2 Values</a:t>
-            </a:r>
-          </a:p>
-          <a:p>
-            <a:pPr lvl="0" indent="0" marL="0">
-              <a:buNone/>
-            </a:pPr>
-            <a:r>
-              <a:rPr/>
-              <a:t>The last three values are the pseudo-R² statistics:</a:t>
-            </a:r>
-          </a:p>
-          <a:p>
-            <a:pPr lvl="0"/>
-            <a:r>
-              <a:rPr b="1"/>
-              <a:t>McFadden</a:t>
-            </a:r>
-            <a:r>
-              <a:rPr/>
-              <a:t>: Compares model to null model</a:t>
-            </a:r>
-          </a:p>
-          <a:p>
-            <a:pPr lvl="0"/>
-            <a:r>
-              <a:rPr b="1"/>
-              <a:t>r2ML</a:t>
-            </a:r>
-            <a:r>
-              <a:rPr/>
-              <a:t>: Maximum likelihood based R²</a:t>
-            </a:r>
-          </a:p>
-          <a:p>
-            <a:pPr lvl="0"/>
-            <a:r>
-              <a:rPr b="1"/>
-              <a:t>r2CU</a:t>
-            </a:r>
-            <a:r>
-              <a:rPr/>
-              <a:t>: Cragg-Uhler (Nagelkerke) R²</a:t>
-            </a:r>
-          </a:p>
-          <a:p>
-            <a:pPr lvl="0" indent="0" marL="0">
-              <a:buNone/>
-            </a:pPr>
-            <a:r>
-              <a:rPr/>
-              <a:t>Values around 0.4-0.5 indicate moderate to good fit. Our model explains approximately 40-50% of the variation in sexual maturity status.</a:t>
+              <a:rPr>
+                <a:solidFill>
+                  <a:srgbClr val="5E5E5E"/>
+                </a:solidFill>
+                <a:latin typeface="Courier"/>
+              </a:rPr>
+              <a:t># Fit logistic regression model</a:t>
+            </a:r>
+            <a:br/>
+            <a:r>
+              <a:rPr>
+                <a:solidFill>
+                  <a:srgbClr val="5E5E5E"/>
+                </a:solidFill>
+                <a:latin typeface="Courier"/>
+              </a:rPr>
+              <a:t># family = binomial tells R we have binary data</a:t>
+            </a:r>
+            <a:br/>
+            <a:r>
+              <a:rPr>
+                <a:solidFill>
+                  <a:srgbClr val="003B4F"/>
+                </a:solidFill>
+                <a:latin typeface="Courier"/>
+              </a:rPr>
+              <a:t>logistic_model &lt;- </a:t>
+            </a:r>
+            <a:r>
+              <a:rPr>
+                <a:solidFill>
+                  <a:srgbClr val="4758AB"/>
+                </a:solidFill>
+                <a:latin typeface="Courier"/>
+              </a:rPr>
+              <a:t>glm</a:t>
+            </a:r>
+            <a:r>
+              <a:rPr>
+                <a:solidFill>
+                  <a:srgbClr val="003B4F"/>
+                </a:solidFill>
+                <a:latin typeface="Courier"/>
+              </a:rPr>
+              <a:t>(mature </a:t>
+            </a:r>
+            <a:r>
+              <a:rPr>
+                <a:solidFill>
+                  <a:srgbClr val="5E5E5E"/>
+                </a:solidFill>
+                <a:latin typeface="Courier"/>
+              </a:rPr>
+              <a:t>~</a:t>
+            </a:r>
+            <a:r>
+              <a:rPr>
+                <a:solidFill>
+                  <a:srgbClr val="003B4F"/>
+                </a:solidFill>
+                <a:latin typeface="Courier"/>
+              </a:rPr>
+              <a:t> length, </a:t>
+            </a:r>
+            <a:br/>
+            <a:r>
+              <a:rPr>
+                <a:solidFill>
+                  <a:srgbClr val="003B4F"/>
+                </a:solidFill>
+                <a:latin typeface="Courier"/>
+              </a:rPr>
+              <a:t>                      </a:t>
+            </a:r>
+            <a:r>
+              <a:rPr>
+                <a:solidFill>
+                  <a:srgbClr val="657422"/>
+                </a:solidFill>
+                <a:latin typeface="Courier"/>
+              </a:rPr>
+              <a:t>data =</a:t>
+            </a:r>
+            <a:r>
+              <a:rPr>
+                <a:solidFill>
+                  <a:srgbClr val="003B4F"/>
+                </a:solidFill>
+                <a:latin typeface="Courier"/>
+              </a:rPr>
+              <a:t> lizards_df, </a:t>
+            </a:r>
+            <a:br/>
+            <a:r>
+              <a:rPr>
+                <a:solidFill>
+                  <a:srgbClr val="003B4F"/>
+                </a:solidFill>
+                <a:latin typeface="Courier"/>
+              </a:rPr>
+              <a:t>                      </a:t>
+            </a:r>
+            <a:r>
+              <a:rPr>
+                <a:solidFill>
+                  <a:srgbClr val="657422"/>
+                </a:solidFill>
+                <a:latin typeface="Courier"/>
+              </a:rPr>
+              <a:t>family =</a:t>
+            </a:r>
+            <a:r>
+              <a:rPr>
+                <a:solidFill>
+                  <a:srgbClr val="003B4F"/>
+                </a:solidFill>
+                <a:latin typeface="Courier"/>
+              </a:rPr>
+              <a:t> binomial)</a:t>
+            </a:r>
+            <a:br/>
+            <a:br/>
+            <a:r>
+              <a:rPr>
+                <a:solidFill>
+                  <a:srgbClr val="5E5E5E"/>
+                </a:solidFill>
+                <a:latin typeface="Courier"/>
+              </a:rPr>
+              <a:t># Get model summary</a:t>
+            </a:r>
+            <a:br/>
+            <a:r>
+              <a:rPr>
+                <a:solidFill>
+                  <a:srgbClr val="4758AB"/>
+                </a:solidFill>
+                <a:latin typeface="Courier"/>
+              </a:rPr>
+              <a:t>summary</a:t>
+            </a:r>
+            <a:r>
+              <a:rPr>
+                <a:solidFill>
+                  <a:srgbClr val="003B4F"/>
+                </a:solidFill>
+                <a:latin typeface="Courier"/>
+              </a:rPr>
+              <a:t>(logistic_model)</a:t>
+            </a:r>
+            <a:br/>
+            <a:r>
+              <a:rPr i="1">
+                <a:solidFill>
+                  <a:srgbClr val="5E5E5E"/>
+                </a:solidFill>
+                <a:latin typeface="Courier"/>
+              </a:rPr>
+              <a:t>## </a:t>
+            </a:r>
+            <a:br/>
+            <a:r>
+              <a:rPr i="1">
+                <a:solidFill>
+                  <a:srgbClr val="5E5E5E"/>
+                </a:solidFill>
+                <a:latin typeface="Courier"/>
+              </a:rPr>
+              <a:t>## Call:</a:t>
+            </a:r>
+            <a:br/>
+            <a:r>
+              <a:rPr i="1">
+                <a:solidFill>
+                  <a:srgbClr val="5E5E5E"/>
+                </a:solidFill>
+                <a:latin typeface="Courier"/>
+              </a:rPr>
+              <a:t>## glm(formula = mature ~ length, family = binomial, data = lizards_df)</a:t>
+            </a:r>
+            <a:br/>
+            <a:r>
+              <a:rPr i="1">
+                <a:solidFill>
+                  <a:srgbClr val="5E5E5E"/>
+                </a:solidFill>
+                <a:latin typeface="Courier"/>
+              </a:rPr>
+              <a:t>## </a:t>
+            </a:r>
+            <a:br/>
+            <a:r>
+              <a:rPr i="1">
+                <a:solidFill>
+                  <a:srgbClr val="5E5E5E"/>
+                </a:solidFill>
+                <a:latin typeface="Courier"/>
+              </a:rPr>
+              <a:t>## Coefficients:</a:t>
+            </a:r>
+            <a:br/>
+            <a:r>
+              <a:rPr i="1">
+                <a:solidFill>
+                  <a:srgbClr val="5E5E5E"/>
+                </a:solidFill>
+                <a:latin typeface="Courier"/>
+              </a:rPr>
+              <a:t>##             Estimate Std. Error z value Pr(&gt;|z|)   </a:t>
+            </a:r>
+            <a:br/>
+            <a:r>
+              <a:rPr i="1">
+                <a:solidFill>
+                  <a:srgbClr val="5E5E5E"/>
+                </a:solidFill>
+                <a:latin typeface="Courier"/>
+              </a:rPr>
+              <a:t>## (Intercept)  -6.6899     2.1401  -3.126  0.00177 **</a:t>
+            </a:r>
+            <a:br/>
+            <a:r>
+              <a:rPr i="1">
+                <a:solidFill>
+                  <a:srgbClr val="5E5E5E"/>
+                </a:solidFill>
+                <a:latin typeface="Courier"/>
+              </a:rPr>
+              <a:t>## length        0.2503     0.0775   3.229  0.00124 **</a:t>
+            </a:r>
+            <a:br/>
+            <a:r>
+              <a:rPr i="1">
+                <a:solidFill>
+                  <a:srgbClr val="5E5E5E"/>
+                </a:solidFill>
+                <a:latin typeface="Courier"/>
+              </a:rPr>
+              <a:t>## ---</a:t>
+            </a:r>
+            <a:br/>
+            <a:r>
+              <a:rPr i="1">
+                <a:solidFill>
+                  <a:srgbClr val="5E5E5E"/>
+                </a:solidFill>
+                <a:latin typeface="Courier"/>
+              </a:rPr>
+              <a:t>## Signif. codes:  0 '***' 0.001 '**' 0.01 '*' 0.05 '.' 0.1 ' ' 1</a:t>
+            </a:r>
+            <a:br/>
+            <a:r>
+              <a:rPr i="1">
+                <a:solidFill>
+                  <a:srgbClr val="5E5E5E"/>
+                </a:solidFill>
+                <a:latin typeface="Courier"/>
+              </a:rPr>
+              <a:t>## </a:t>
+            </a:r>
+            <a:br/>
+            <a:r>
+              <a:rPr i="1">
+                <a:solidFill>
+                  <a:srgbClr val="5E5E5E"/>
+                </a:solidFill>
+                <a:latin typeface="Courier"/>
+              </a:rPr>
+              <a:t>## (Dispersion parameter for binomial family taken to be 1)</a:t>
+            </a:r>
+            <a:br/>
+            <a:r>
+              <a:rPr i="1">
+                <a:solidFill>
+                  <a:srgbClr val="5E5E5E"/>
+                </a:solidFill>
+                <a:latin typeface="Courier"/>
+              </a:rPr>
+              <a:t>## </a:t>
+            </a:r>
+            <a:br/>
+            <a:r>
+              <a:rPr i="1">
+                <a:solidFill>
+                  <a:srgbClr val="5E5E5E"/>
+                </a:solidFill>
+                <a:latin typeface="Courier"/>
+              </a:rPr>
+              <a:t>##     Null deviance: 60.176  on 43  degrees of freedom</a:t>
+            </a:r>
+            <a:br/>
+            <a:r>
+              <a:rPr i="1">
+                <a:solidFill>
+                  <a:srgbClr val="5E5E5E"/>
+                </a:solidFill>
+                <a:latin typeface="Courier"/>
+              </a:rPr>
+              <a:t>## Residual deviance: 34.041  on 42  degrees of freedom</a:t>
+            </a:r>
+            <a:br/>
+            <a:r>
+              <a:rPr i="1">
+                <a:solidFill>
+                  <a:srgbClr val="5E5E5E"/>
+                </a:solidFill>
+                <a:latin typeface="Courier"/>
+              </a:rPr>
+              <a:t>## AIC: 38.041</a:t>
+            </a:r>
+            <a:br/>
+            <a:r>
+              <a:rPr i="1">
+                <a:solidFill>
+                  <a:srgbClr val="5E5E5E"/>
+                </a:solidFill>
+                <a:latin typeface="Courier"/>
+              </a:rPr>
+              <a:t>## </a:t>
+            </a:r>
+            <a:br/>
+            <a:r>
+              <a:rPr i="1">
+                <a:solidFill>
+                  <a:srgbClr val="5E5E5E"/>
+                </a:solidFill>
+                <a:latin typeface="Courier"/>
+              </a:rPr>
+              <a:t>## Number of Fisher Scoring iterations: 6</a:t>
             </a:r>
           </a:p>
         </p:txBody>
@@ -3714,7 +3882,7 @@
         <p:spPr>
           <a:xfrm>
             <a:off x="0" y="0"/>
-            <a:ext cx="9144000" cy="871538"/>
+            <a:ext cx="9144000" cy="582780"/>
           </a:xfrm>
         </p:spPr>
         <p:txBody>
@@ -3725,20 +3893,20 @@
               <a:buNone/>
             </a:pPr>
             <a:r>
-              <a:rPr/>
-              <a:t>Step 8: Additional Diagnostics</a:t>
-            </a:r>
-          </a:p>
-        </p:txBody>
-      </p:sp>
-      <p:sp>
-        <p:nvSpPr>
-          <p:cNvPr id="4" name="Text Placeholder 3"/>
-          <p:cNvSpPr>
-            <a:spLocks noGrp="1"/>
-          </p:cNvSpPr>
-          <p:nvPr>
-            <p:ph idx="2" sz="half" type="body"/>
+              <a:rPr b="1"/>
+              <a:t>Interpreting the Model Output</a:t>
+            </a:r>
+          </a:p>
+        </p:txBody>
+      </p:sp>
+      <p:sp>
+        <p:nvSpPr>
+          <p:cNvPr id="3" name="Content Placeholder 2"/>
+          <p:cNvSpPr>
+            <a:spLocks noGrp="1"/>
+          </p:cNvSpPr>
+          <p:nvPr>
+            <p:ph idx="1"/>
           </p:nvPr>
         </p:nvSpPr>
         <p:spPr/>
@@ -3754,41 +3922,87 @@
             </a:pPr>
             <a:r>
               <a:rPr b="1"/>
-              <a:t>Creating a More Detailed Summary Plot</a:t>
-            </a:r>
-          </a:p>
-        </p:txBody>
-      </p:sp>
-      <p:pic>
-        <p:nvPicPr>
-          <p:cNvPr descr="review_lecture_files/figure-pptx/diagnostic_plot-1.png" id="0" name="Picture 1"/>
-          <p:cNvPicPr>
-            <a:picLocks noGrp="1" noChangeAspect="1"/>
-          </p:cNvPicPr>
-          <p:nvPr/>
-        </p:nvPicPr>
-        <p:blipFill>
-          <a:blip r:embed="rId2"/>
-          <a:stretch>
-            <a:fillRect/>
-          </a:stretch>
-        </p:blipFill>
-        <p:spPr bwMode="auto">
-          <a:xfrm>
-            <a:off x="3657600" y="1244600"/>
-            <a:ext cx="5232400" cy="3225800"/>
-          </a:xfrm>
-          <a:prstGeom prst="rect">
-            <a:avLst/>
-          </a:prstGeom>
-          <a:noFill/>
-          <a:ln w="9525">
-            <a:noFill/>
-            <a:headEnd/>
-            <a:tailEnd/>
-          </a:ln>
-        </p:spPr>
-      </p:pic>
+              <a:t>Coefficients:</a:t>
+            </a:r>
+          </a:p>
+          <a:p>
+            <a:pPr lvl="0"/>
+            <a:r>
+              <a:rPr b="1"/>
+              <a:t>Intercept (β₀)</a:t>
+            </a:r>
+            <a:r>
+              <a:rPr/>
+              <a:t>: -5.5847 - The log-odds when length = 0</a:t>
+            </a:r>
+          </a:p>
+          <a:p>
+            <a:pPr lvl="0"/>
+            <a:r>
+              <a:rPr b="1"/>
+              <a:t>Slope (β₁)</a:t>
+            </a:r>
+            <a:r>
+              <a:rPr/>
+              <a:t>: 0.2503 - Change in log-odds for each 1 cm increase in length</a:t>
+            </a:r>
+          </a:p>
+          <a:p>
+            <a:pPr lvl="0" indent="0" marL="0">
+              <a:spcBef>
+                <a:spcPts val="3000"/>
+              </a:spcBef>
+              <a:buNone/>
+            </a:pPr>
+            <a:r>
+              <a:rPr b="1"/>
+              <a:t>P-values:</a:t>
+            </a:r>
+          </a:p>
+          <a:p>
+            <a:pPr lvl="0"/>
+            <a:r>
+              <a:rPr/>
+              <a:t>Both coefficients are significant (p &lt; 0.05)</a:t>
+            </a:r>
+          </a:p>
+          <a:p>
+            <a:pPr lvl="0"/>
+            <a:r>
+              <a:rPr/>
+              <a:t>We reject the null hypothesis that β₁ = 0</a:t>
+            </a:r>
+          </a:p>
+          <a:p>
+            <a:pPr lvl="0"/>
+            <a:r>
+              <a:rPr/>
+              <a:t>There IS a relationship between length and sexual maturity</a:t>
+            </a:r>
+          </a:p>
+          <a:p>
+            <a:pPr lvl="0" indent="0" marL="0">
+              <a:spcBef>
+                <a:spcPts val="3000"/>
+              </a:spcBef>
+              <a:buNone/>
+            </a:pPr>
+            <a:r>
+              <a:rPr b="1"/>
+              <a:t>Understanding the Slope:</a:t>
+            </a:r>
+          </a:p>
+          <a:p>
+            <a:pPr lvl="0" indent="0" marL="0">
+              <a:buNone/>
+            </a:pPr>
+            <a:r>
+              <a:rPr/>
+              <a:t>The positive slope (0.2503) indicates: - Longer lizards are more likely to be sexually mature - For each 1 cm increase in length, the log-odds of maturity increase by 0.2503</a:t>
+            </a:r>
+          </a:p>
+        </p:txBody>
+      </p:sp>
     </p:spTree>
   </p:cSld>
 </p:sld>
@@ -3836,211 +4050,2220 @@
             </a:pPr>
             <a:r>
               <a:rPr/>
-              <a:t>Summary: Key Takeaways</a:t>
-            </a:r>
-          </a:p>
-        </p:txBody>
-      </p:sp>
-      <p:sp>
-        <p:nvSpPr>
-          <p:cNvPr id="3" name="Content Placeholder 2"/>
-          <p:cNvSpPr>
-            <a:spLocks noGrp="1"/>
-          </p:cNvSpPr>
-          <p:nvPr>
-            <p:ph idx="1"/>
-          </p:nvPr>
-        </p:nvSpPr>
-        <p:spPr/>
+              <a:t>Step 4: Convert Log-Odds to Odds</a:t>
+            </a:r>
+          </a:p>
+        </p:txBody>
+      </p:sp>
+    </p:spTree>
+  </p:cSld>
+</p:sld>
+</file>
+
+<file path=ppt/slides/slide14.xml><?xml version="1.0" encoding="utf-8"?>
+<p:sld xmlns:a="http://schemas.openxmlformats.org/drawingml/2006/main" xmlns:r="http://schemas.openxmlformats.org/officeDocument/2006/relationships" xmlns:p="http://schemas.openxmlformats.org/presentationml/2006/main">
+  <p:cSld>
+    <p:spTree>
+      <p:nvGrpSpPr>
+        <p:cNvPr id="1" name=""/>
+        <p:cNvGrpSpPr/>
+        <p:nvPr/>
+      </p:nvGrpSpPr>
+      <p:grpSpPr>
+        <a:xfrm>
+          <a:off x="0" y="0"/>
+          <a:ext cx="0" cy="0"/>
+          <a:chOff x="0" y="0"/>
+          <a:chExt cx="0" cy="0"/>
+        </a:xfrm>
+      </p:grpSpPr>
+      <p:sp>
+        <p:nvSpPr>
+          <p:cNvPr id="2" name="Title 1"/>
+          <p:cNvSpPr>
+            <a:spLocks noGrp="1"/>
+          </p:cNvSpPr>
+          <p:nvPr>
+            <p:ph type="title"/>
+          </p:nvPr>
+        </p:nvSpPr>
+        <p:spPr>
+          <a:xfrm>
+            <a:off x="0" y="0"/>
+            <a:ext cx="9144000" cy="582780"/>
+          </a:xfrm>
+        </p:spPr>
         <p:txBody>
           <a:bodyPr/>
           <a:lstStyle/>
           <a:p>
             <a:pPr lvl="0" indent="0" marL="0">
-              <a:spcBef>
-                <a:spcPts val="3000"/>
-              </a:spcBef>
               <a:buNone/>
             </a:pPr>
             <a:r>
               <a:rPr b="1"/>
-              <a:t>What We Learned:</a:t>
-            </a:r>
-          </a:p>
-          <a:p>
-            <a:pPr lvl="0" indent="-342900" marL="342900">
-              <a:buAutoNum type="arabicPeriod"/>
+              <a:t>Making the Results More Interpretable</a:t>
+            </a:r>
+          </a:p>
+        </p:txBody>
+      </p:sp>
+      <p:sp>
+        <p:nvSpPr>
+          <p:cNvPr id="3" name="Content Placeholder 2"/>
+          <p:cNvSpPr>
+            <a:spLocks noGrp="1"/>
+          </p:cNvSpPr>
+          <p:nvPr>
+            <p:ph idx="1"/>
+          </p:nvPr>
+        </p:nvSpPr>
+        <p:spPr/>
+        <p:txBody>
+          <a:bodyPr/>
+          <a:lstStyle/>
+          <a:p>
+            <a:pPr lvl="0" indent="0" marL="0">
+              <a:buNone/>
             </a:pPr>
             <a:r>
+              <a:rPr/>
+              <a:t>Log-odds are hard to interpret. Let’s convert to odds:</a:t>
+            </a:r>
+          </a:p>
+          <a:p>
+            <a:pPr lvl="0" indent="0">
+              <a:buNone/>
+            </a:pPr>
+            <a:r>
+              <a:rPr>
+                <a:solidFill>
+                  <a:srgbClr val="5E5E5E"/>
+                </a:solidFill>
+                <a:latin typeface="Courier"/>
+              </a:rPr>
+              <a:t># Extract the slope coefficient</a:t>
+            </a:r>
+            <a:br/>
+            <a:r>
+              <a:rPr>
+                <a:solidFill>
+                  <a:srgbClr val="003B4F"/>
+                </a:solidFill>
+                <a:latin typeface="Courier"/>
+              </a:rPr>
+              <a:t>slope_coefficient &lt;- </a:t>
+            </a:r>
+            <a:r>
+              <a:rPr>
+                <a:solidFill>
+                  <a:srgbClr val="4758AB"/>
+                </a:solidFill>
+                <a:latin typeface="Courier"/>
+              </a:rPr>
+              <a:t>coef</a:t>
+            </a:r>
+            <a:r>
+              <a:rPr>
+                <a:solidFill>
+                  <a:srgbClr val="003B4F"/>
+                </a:solidFill>
+                <a:latin typeface="Courier"/>
+              </a:rPr>
+              <a:t>(logistic_model)[</a:t>
+            </a:r>
+            <a:r>
+              <a:rPr>
+                <a:solidFill>
+                  <a:srgbClr val="AD0000"/>
+                </a:solidFill>
+                <a:latin typeface="Courier"/>
+              </a:rPr>
+              <a:t>2</a:t>
+            </a:r>
+            <a:r>
+              <a:rPr>
+                <a:solidFill>
+                  <a:srgbClr val="003B4F"/>
+                </a:solidFill>
+                <a:latin typeface="Courier"/>
+              </a:rPr>
+              <a:t>]</a:t>
+            </a:r>
+            <a:br/>
+            <a:br/>
+            <a:r>
+              <a:rPr>
+                <a:solidFill>
+                  <a:srgbClr val="5E5E5E"/>
+                </a:solidFill>
+                <a:latin typeface="Courier"/>
+              </a:rPr>
+              <a:t># Convert log-odds to odds ratio</a:t>
+            </a:r>
+            <a:br/>
+            <a:r>
+              <a:rPr>
+                <a:solidFill>
+                  <a:srgbClr val="003B4F"/>
+                </a:solidFill>
+                <a:latin typeface="Courier"/>
+              </a:rPr>
+              <a:t>odds_ratio &lt;- </a:t>
+            </a:r>
+            <a:r>
+              <a:rPr>
+                <a:solidFill>
+                  <a:srgbClr val="4758AB"/>
+                </a:solidFill>
+                <a:latin typeface="Courier"/>
+              </a:rPr>
+              <a:t>exp</a:t>
+            </a:r>
+            <a:r>
+              <a:rPr>
+                <a:solidFill>
+                  <a:srgbClr val="003B4F"/>
+                </a:solidFill>
+                <a:latin typeface="Courier"/>
+              </a:rPr>
+              <a:t>(slope_coefficient)</a:t>
+            </a:r>
+            <a:br/>
+            <a:r>
+              <a:rPr>
+                <a:solidFill>
+                  <a:srgbClr val="003B4F"/>
+                </a:solidFill>
+                <a:latin typeface="Courier"/>
+              </a:rPr>
+              <a:t>odds_ratio</a:t>
+            </a:r>
+            <a:br/>
+            <a:r>
+              <a:rPr i="1">
+                <a:solidFill>
+                  <a:srgbClr val="5E5E5E"/>
+                </a:solidFill>
+                <a:latin typeface="Courier"/>
+              </a:rPr>
+              <a:t>##   length </a:t>
+            </a:r>
+            <a:br/>
+            <a:r>
+              <a:rPr i="1">
+                <a:solidFill>
+                  <a:srgbClr val="5E5E5E"/>
+                </a:solidFill>
+                <a:latin typeface="Courier"/>
+              </a:rPr>
+              <a:t>## 1.284388</a:t>
+            </a:r>
+            <a:br/>
+            <a:br/>
+            <a:r>
+              <a:rPr>
+                <a:solidFill>
+                  <a:srgbClr val="5E5E5E"/>
+                </a:solidFill>
+                <a:latin typeface="Courier"/>
+              </a:rPr>
+              <a:t># Interpretation</a:t>
+            </a:r>
+            <a:br/>
+            <a:r>
+              <a:rPr>
+                <a:solidFill>
+                  <a:srgbClr val="5E5E5E"/>
+                </a:solidFill>
+                <a:latin typeface="Courier"/>
+              </a:rPr>
+              <a:t># For every 1 cm increase in length, the odds of being sexually mature</a:t>
+            </a:r>
+            <a:br/>
+            <a:r>
+              <a:rPr>
+                <a:solidFill>
+                  <a:srgbClr val="5E5E5E"/>
+                </a:solidFill>
+                <a:latin typeface="Courier"/>
+              </a:rPr>
+              <a:t># increase by a factor of 1.284 (or about 28.4%)</a:t>
+            </a:r>
+          </a:p>
+        </p:txBody>
+      </p:sp>
+    </p:spTree>
+  </p:cSld>
+</p:sld>
+</file>
+
+<file path=ppt/slides/slide15.xml><?xml version="1.0" encoding="utf-8"?>
+<p:sld xmlns:a="http://schemas.openxmlformats.org/drawingml/2006/main" xmlns:r="http://schemas.openxmlformats.org/officeDocument/2006/relationships" xmlns:p="http://schemas.openxmlformats.org/presentationml/2006/main">
+  <p:cSld>
+    <p:spTree>
+      <p:nvGrpSpPr>
+        <p:cNvPr id="1" name=""/>
+        <p:cNvGrpSpPr/>
+        <p:nvPr/>
+      </p:nvGrpSpPr>
+      <p:grpSpPr>
+        <a:xfrm>
+          <a:off x="0" y="0"/>
+          <a:ext cx="0" cy="0"/>
+          <a:chOff x="0" y="0"/>
+          <a:chExt cx="0" cy="0"/>
+        </a:xfrm>
+      </p:grpSpPr>
+      <p:sp>
+        <p:nvSpPr>
+          <p:cNvPr id="2" name="Title 1"/>
+          <p:cNvSpPr>
+            <a:spLocks noGrp="1"/>
+          </p:cNvSpPr>
+          <p:nvPr>
+            <p:ph type="title"/>
+          </p:nvPr>
+        </p:nvSpPr>
+        <p:spPr>
+          <a:xfrm>
+            <a:off x="0" y="0"/>
+            <a:ext cx="9144000" cy="582780"/>
+          </a:xfrm>
+        </p:spPr>
+        <p:txBody>
+          <a:bodyPr/>
+          <a:lstStyle/>
+          <a:p>
+            <a:pPr lvl="0" indent="0" marL="0">
+              <a:buNone/>
+            </a:pPr>
+            <a:r>
+              <a:rPr/>
+              <a:t>Step 5: Create the Logistic Regression Plot</a:t>
+            </a:r>
+          </a:p>
+        </p:txBody>
+      </p:sp>
+    </p:spTree>
+  </p:cSld>
+</p:sld>
+</file>
+
+<file path=ppt/slides/slide16.xml><?xml version="1.0" encoding="utf-8"?>
+<p:sld xmlns:a="http://schemas.openxmlformats.org/drawingml/2006/main" xmlns:r="http://schemas.openxmlformats.org/officeDocument/2006/relationships" xmlns:p="http://schemas.openxmlformats.org/presentationml/2006/main">
+  <p:cSld>
+    <p:spTree>
+      <p:nvGrpSpPr>
+        <p:cNvPr id="1" name=""/>
+        <p:cNvGrpSpPr/>
+        <p:nvPr/>
+      </p:nvGrpSpPr>
+      <p:grpSpPr>
+        <a:xfrm>
+          <a:off x="0" y="0"/>
+          <a:ext cx="0" cy="0"/>
+          <a:chOff x="0" y="0"/>
+          <a:chExt cx="0" cy="0"/>
+        </a:xfrm>
+      </p:grpSpPr>
+      <p:sp>
+        <p:nvSpPr>
+          <p:cNvPr id="2" name="Title 1"/>
+          <p:cNvSpPr>
+            <a:spLocks noGrp="1"/>
+          </p:cNvSpPr>
+          <p:nvPr>
+            <p:ph type="title"/>
+          </p:nvPr>
+        </p:nvSpPr>
+        <p:spPr>
+          <a:xfrm>
+            <a:off x="0" y="0"/>
+            <a:ext cx="9144000" cy="871538"/>
+          </a:xfrm>
+        </p:spPr>
+        <p:txBody>
+          <a:bodyPr/>
+          <a:lstStyle/>
+          <a:p>
+            <a:pPr lvl="0" indent="0" marL="0">
+              <a:buNone/>
+            </a:pPr>
+            <a:r>
               <a:rPr b="1"/>
-              <a:t>Logistic regression</a:t>
-            </a:r>
+              <a:t>Visualizing the Probability Curve</a:t>
+            </a:r>
+          </a:p>
+        </p:txBody>
+      </p:sp>
+      <p:sp>
+        <p:nvSpPr>
+          <p:cNvPr id="4" name="Text Placeholder 3"/>
+          <p:cNvSpPr>
+            <a:spLocks noGrp="1"/>
+          </p:cNvSpPr>
+          <p:nvPr>
+            <p:ph idx="2" sz="half" type="body"/>
+          </p:nvPr>
+        </p:nvSpPr>
+        <p:spPr/>
+        <p:txBody>
+          <a:bodyPr/>
+          <a:lstStyle/>
+          <a:p>
+            <a:pPr lvl="0" indent="0">
+              <a:buNone/>
+            </a:pPr>
+            <a:r>
+              <a:rPr>
+                <a:solidFill>
+                  <a:srgbClr val="5E5E5E"/>
+                </a:solidFill>
+                <a:latin typeface="Courier"/>
+              </a:rPr>
+              <a:t># Create sequence of x-values for prediction</a:t>
+            </a:r>
+            <a:br/>
+            <a:r>
+              <a:rPr>
+                <a:solidFill>
+                  <a:srgbClr val="003B4F"/>
+                </a:solidFill>
+                <a:latin typeface="Courier"/>
+              </a:rPr>
+              <a:t>xvals &lt;- </a:t>
+            </a:r>
+            <a:r>
+              <a:rPr>
+                <a:solidFill>
+                  <a:srgbClr val="4758AB"/>
+                </a:solidFill>
+                <a:latin typeface="Courier"/>
+              </a:rPr>
+              <a:t>seq</a:t>
+            </a:r>
+            <a:r>
+              <a:rPr>
+                <a:solidFill>
+                  <a:srgbClr val="003B4F"/>
+                </a:solidFill>
+                <a:latin typeface="Courier"/>
+              </a:rPr>
+              <a:t>(</a:t>
+            </a:r>
+            <a:r>
+              <a:rPr>
+                <a:solidFill>
+                  <a:srgbClr val="657422"/>
+                </a:solidFill>
+                <a:latin typeface="Courier"/>
+              </a:rPr>
+              <a:t>from =</a:t>
+            </a:r>
+            <a:r>
+              <a:rPr>
+                <a:solidFill>
+                  <a:srgbClr val="003B4F"/>
+                </a:solidFill>
+                <a:latin typeface="Courier"/>
+              </a:rPr>
+              <a:t> </a:t>
+            </a:r>
+            <a:r>
+              <a:rPr>
+                <a:solidFill>
+                  <a:srgbClr val="AD0000"/>
+                </a:solidFill>
+                <a:latin typeface="Courier"/>
+              </a:rPr>
+              <a:t>10</a:t>
+            </a:r>
+            <a:r>
+              <a:rPr>
+                <a:solidFill>
+                  <a:srgbClr val="003B4F"/>
+                </a:solidFill>
+                <a:latin typeface="Courier"/>
+              </a:rPr>
+              <a:t>, </a:t>
+            </a:r>
+            <a:r>
+              <a:rPr>
+                <a:solidFill>
+                  <a:srgbClr val="657422"/>
+                </a:solidFill>
+                <a:latin typeface="Courier"/>
+              </a:rPr>
+              <a:t>to =</a:t>
+            </a:r>
+            <a:r>
+              <a:rPr>
+                <a:solidFill>
+                  <a:srgbClr val="003B4F"/>
+                </a:solidFill>
+                <a:latin typeface="Courier"/>
+              </a:rPr>
+              <a:t> </a:t>
+            </a:r>
+            <a:r>
+              <a:rPr>
+                <a:solidFill>
+                  <a:srgbClr val="AD0000"/>
+                </a:solidFill>
+                <a:latin typeface="Courier"/>
+              </a:rPr>
+              <a:t>50</a:t>
+            </a:r>
+            <a:r>
+              <a:rPr>
+                <a:solidFill>
+                  <a:srgbClr val="003B4F"/>
+                </a:solidFill>
+                <a:latin typeface="Courier"/>
+              </a:rPr>
+              <a:t>, </a:t>
+            </a:r>
+            <a:r>
+              <a:rPr>
+                <a:solidFill>
+                  <a:srgbClr val="657422"/>
+                </a:solidFill>
+                <a:latin typeface="Courier"/>
+              </a:rPr>
+              <a:t>by =</a:t>
+            </a:r>
+            <a:r>
+              <a:rPr>
+                <a:solidFill>
+                  <a:srgbClr val="003B4F"/>
+                </a:solidFill>
+                <a:latin typeface="Courier"/>
+              </a:rPr>
+              <a:t> </a:t>
+            </a:r>
+            <a:r>
+              <a:rPr>
+                <a:solidFill>
+                  <a:srgbClr val="AD0000"/>
+                </a:solidFill>
+                <a:latin typeface="Courier"/>
+              </a:rPr>
+              <a:t>0.01</a:t>
+            </a:r>
+            <a:r>
+              <a:rPr>
+                <a:solidFill>
+                  <a:srgbClr val="003B4F"/>
+                </a:solidFill>
+                <a:latin typeface="Courier"/>
+              </a:rPr>
+              <a:t>)</a:t>
+            </a:r>
+            <a:br/>
+            <a:br/>
+            <a:r>
+              <a:rPr>
+                <a:solidFill>
+                  <a:srgbClr val="5E5E5E"/>
+                </a:solidFill>
+                <a:latin typeface="Courier"/>
+              </a:rPr>
+              <a:t># Get predicted probabilities</a:t>
+            </a:r>
+            <a:br/>
+            <a:r>
+              <a:rPr>
+                <a:solidFill>
+                  <a:srgbClr val="003B4F"/>
+                </a:solidFill>
+                <a:latin typeface="Courier"/>
+              </a:rPr>
+              <a:t>yvals &lt;- </a:t>
+            </a:r>
+            <a:r>
+              <a:rPr>
+                <a:solidFill>
+                  <a:srgbClr val="4758AB"/>
+                </a:solidFill>
+                <a:latin typeface="Courier"/>
+              </a:rPr>
+              <a:t>predict</a:t>
+            </a:r>
+            <a:r>
+              <a:rPr>
+                <a:solidFill>
+                  <a:srgbClr val="003B4F"/>
+                </a:solidFill>
+                <a:latin typeface="Courier"/>
+              </a:rPr>
+              <a:t>(logistic_model, </a:t>
+            </a:r>
+            <a:br/>
+            <a:r>
+              <a:rPr>
+                <a:solidFill>
+                  <a:srgbClr val="003B4F"/>
+                </a:solidFill>
+                <a:latin typeface="Courier"/>
+              </a:rPr>
+              <a:t>                 </a:t>
+            </a:r>
+            <a:r>
+              <a:rPr>
+                <a:solidFill>
+                  <a:srgbClr val="4758AB"/>
+                </a:solidFill>
+                <a:latin typeface="Courier"/>
+              </a:rPr>
+              <a:t>list</a:t>
+            </a:r>
+            <a:r>
+              <a:rPr>
+                <a:solidFill>
+                  <a:srgbClr val="003B4F"/>
+                </a:solidFill>
+                <a:latin typeface="Courier"/>
+              </a:rPr>
+              <a:t>(</a:t>
+            </a:r>
+            <a:r>
+              <a:rPr>
+                <a:solidFill>
+                  <a:srgbClr val="657422"/>
+                </a:solidFill>
+                <a:latin typeface="Courier"/>
+              </a:rPr>
+              <a:t>length =</a:t>
+            </a:r>
+            <a:r>
+              <a:rPr>
+                <a:solidFill>
+                  <a:srgbClr val="003B4F"/>
+                </a:solidFill>
+                <a:latin typeface="Courier"/>
+              </a:rPr>
+              <a:t> xvals), </a:t>
+            </a:r>
+            <a:br/>
+            <a:r>
+              <a:rPr>
+                <a:solidFill>
+                  <a:srgbClr val="003B4F"/>
+                </a:solidFill>
+                <a:latin typeface="Courier"/>
+              </a:rPr>
+              <a:t>                 </a:t>
+            </a:r>
+            <a:r>
+              <a:rPr>
+                <a:solidFill>
+                  <a:srgbClr val="657422"/>
+                </a:solidFill>
+                <a:latin typeface="Courier"/>
+              </a:rPr>
+              <a:t>type =</a:t>
+            </a:r>
+            <a:r>
+              <a:rPr>
+                <a:solidFill>
+                  <a:srgbClr val="003B4F"/>
+                </a:solidFill>
+                <a:latin typeface="Courier"/>
+              </a:rPr>
+              <a:t> </a:t>
+            </a:r>
+            <a:r>
+              <a:rPr>
+                <a:solidFill>
+                  <a:srgbClr val="20794D"/>
+                </a:solidFill>
+                <a:latin typeface="Courier"/>
+              </a:rPr>
+              <a:t>"response"</a:t>
+            </a:r>
+            <a:r>
+              <a:rPr>
+                <a:solidFill>
+                  <a:srgbClr val="003B4F"/>
+                </a:solidFill>
+                <a:latin typeface="Courier"/>
+              </a:rPr>
+              <a:t>)</a:t>
+            </a:r>
+            <a:br/>
+            <a:br/>
+            <a:r>
+              <a:rPr>
+                <a:solidFill>
+                  <a:srgbClr val="5E5E5E"/>
+                </a:solidFill>
+                <a:latin typeface="Courier"/>
+              </a:rPr>
+              <a:t># Create prediction dataframe for plotting</a:t>
+            </a:r>
+            <a:br/>
+            <a:r>
+              <a:rPr>
+                <a:solidFill>
+                  <a:srgbClr val="003B4F"/>
+                </a:solidFill>
+                <a:latin typeface="Courier"/>
+              </a:rPr>
+              <a:t>prediction_df &lt;- </a:t>
+            </a:r>
+            <a:r>
+              <a:rPr>
+                <a:solidFill>
+                  <a:srgbClr val="4758AB"/>
+                </a:solidFill>
+                <a:latin typeface="Courier"/>
+              </a:rPr>
+              <a:t>data.frame</a:t>
+            </a:r>
+            <a:r>
+              <a:rPr>
+                <a:solidFill>
+                  <a:srgbClr val="003B4F"/>
+                </a:solidFill>
+                <a:latin typeface="Courier"/>
+              </a:rPr>
+              <a:t>(</a:t>
+            </a:r>
+            <a:r>
+              <a:rPr>
+                <a:solidFill>
+                  <a:srgbClr val="657422"/>
+                </a:solidFill>
+                <a:latin typeface="Courier"/>
+              </a:rPr>
+              <a:t>length =</a:t>
+            </a:r>
+            <a:r>
+              <a:rPr>
+                <a:solidFill>
+                  <a:srgbClr val="003B4F"/>
+                </a:solidFill>
+                <a:latin typeface="Courier"/>
+              </a:rPr>
+              <a:t> xvals, </a:t>
+            </a:r>
+            <a:br/>
+            <a:r>
+              <a:rPr>
+                <a:solidFill>
+                  <a:srgbClr val="003B4F"/>
+                </a:solidFill>
+                <a:latin typeface="Courier"/>
+              </a:rPr>
+              <a:t>                           </a:t>
+            </a:r>
+            <a:r>
+              <a:rPr>
+                <a:solidFill>
+                  <a:srgbClr val="657422"/>
+                </a:solidFill>
+                <a:latin typeface="Courier"/>
+              </a:rPr>
+              <a:t>probability =</a:t>
+            </a:r>
+            <a:r>
+              <a:rPr>
+                <a:solidFill>
+                  <a:srgbClr val="003B4F"/>
+                </a:solidFill>
+                <a:latin typeface="Courier"/>
+              </a:rPr>
+              <a:t> yvals)</a:t>
+            </a:r>
+          </a:p>
+          <a:p>
+            <a:pPr lvl="0" indent="0">
+              <a:buNone/>
+            </a:pPr>
+            <a:r>
+              <a:rPr>
+                <a:solidFill>
+                  <a:srgbClr val="5E5E5E"/>
+                </a:solidFill>
+                <a:latin typeface="Courier"/>
+              </a:rPr>
+              <a:t># Create the logistic regression plot</a:t>
+            </a:r>
+            <a:br/>
+            <a:r>
+              <a:rPr>
+                <a:solidFill>
+                  <a:srgbClr val="003B4F"/>
+                </a:solidFill>
+                <a:latin typeface="Courier"/>
+              </a:rPr>
+              <a:t>logistic_plot &lt;- </a:t>
+            </a:r>
+            <a:r>
+              <a:rPr>
+                <a:solidFill>
+                  <a:srgbClr val="4758AB"/>
+                </a:solidFill>
+                <a:latin typeface="Courier"/>
+              </a:rPr>
+              <a:t>ggplot</a:t>
+            </a:r>
+            <a:r>
+              <a:rPr>
+                <a:solidFill>
+                  <a:srgbClr val="003B4F"/>
+                </a:solidFill>
+                <a:latin typeface="Courier"/>
+              </a:rPr>
+              <a:t>() </a:t>
+            </a:r>
+            <a:r>
+              <a:rPr>
+                <a:solidFill>
+                  <a:srgbClr val="5E5E5E"/>
+                </a:solidFill>
+                <a:latin typeface="Courier"/>
+              </a:rPr>
+              <a:t>+</a:t>
+            </a:r>
+            <a:br/>
+            <a:r>
+              <a:rPr>
+                <a:solidFill>
+                  <a:srgbClr val="003B4F"/>
+                </a:solidFill>
+                <a:latin typeface="Courier"/>
+              </a:rPr>
+              <a:t>  </a:t>
+            </a:r>
+            <a:r>
+              <a:rPr>
+                <a:solidFill>
+                  <a:srgbClr val="5E5E5E"/>
+                </a:solidFill>
+                <a:latin typeface="Courier"/>
+              </a:rPr>
+              <a:t># Add data points</a:t>
+            </a:r>
+            <a:br/>
+            <a:r>
+              <a:rPr>
+                <a:solidFill>
+                  <a:srgbClr val="003B4F"/>
+                </a:solidFill>
+                <a:latin typeface="Courier"/>
+              </a:rPr>
+              <a:t>  </a:t>
+            </a:r>
+            <a:r>
+              <a:rPr>
+                <a:solidFill>
+                  <a:srgbClr val="4758AB"/>
+                </a:solidFill>
+                <a:latin typeface="Courier"/>
+              </a:rPr>
+              <a:t>geom_point</a:t>
+            </a:r>
+            <a:r>
+              <a:rPr>
+                <a:solidFill>
+                  <a:srgbClr val="003B4F"/>
+                </a:solidFill>
+                <a:latin typeface="Courier"/>
+              </a:rPr>
+              <a:t>(</a:t>
+            </a:r>
+            <a:r>
+              <a:rPr>
+                <a:solidFill>
+                  <a:srgbClr val="657422"/>
+                </a:solidFill>
+                <a:latin typeface="Courier"/>
+              </a:rPr>
+              <a:t>data =</a:t>
+            </a:r>
+            <a:r>
+              <a:rPr>
+                <a:solidFill>
+                  <a:srgbClr val="003B4F"/>
+                </a:solidFill>
+                <a:latin typeface="Courier"/>
+              </a:rPr>
+              <a:t> lizards_df, </a:t>
+            </a:r>
+            <a:br/>
+            <a:r>
+              <a:rPr>
+                <a:solidFill>
+                  <a:srgbClr val="003B4F"/>
+                </a:solidFill>
+                <a:latin typeface="Courier"/>
+              </a:rPr>
+              <a:t>             </a:t>
+            </a:r>
+            <a:r>
+              <a:rPr>
+                <a:solidFill>
+                  <a:srgbClr val="4758AB"/>
+                </a:solidFill>
+                <a:latin typeface="Courier"/>
+              </a:rPr>
+              <a:t>aes</a:t>
+            </a:r>
+            <a:r>
+              <a:rPr>
+                <a:solidFill>
+                  <a:srgbClr val="003B4F"/>
+                </a:solidFill>
+                <a:latin typeface="Courier"/>
+              </a:rPr>
+              <a:t>(</a:t>
+            </a:r>
+            <a:r>
+              <a:rPr>
+                <a:solidFill>
+                  <a:srgbClr val="657422"/>
+                </a:solidFill>
+                <a:latin typeface="Courier"/>
+              </a:rPr>
+              <a:t>x =</a:t>
+            </a:r>
+            <a:r>
+              <a:rPr>
+                <a:solidFill>
+                  <a:srgbClr val="003B4F"/>
+                </a:solidFill>
+                <a:latin typeface="Courier"/>
+              </a:rPr>
+              <a:t> length, </a:t>
+            </a:r>
+            <a:r>
+              <a:rPr>
+                <a:solidFill>
+                  <a:srgbClr val="657422"/>
+                </a:solidFill>
+                <a:latin typeface="Courier"/>
+              </a:rPr>
+              <a:t>y =</a:t>
+            </a:r>
+            <a:r>
+              <a:rPr>
+                <a:solidFill>
+                  <a:srgbClr val="003B4F"/>
+                </a:solidFill>
+                <a:latin typeface="Courier"/>
+              </a:rPr>
+              <a:t> mature),</a:t>
+            </a:r>
+            <a:br/>
+            <a:r>
+              <a:rPr>
+                <a:solidFill>
+                  <a:srgbClr val="003B4F"/>
+                </a:solidFill>
+                <a:latin typeface="Courier"/>
+              </a:rPr>
+              <a:t>             </a:t>
+            </a:r>
+            <a:r>
+              <a:rPr>
+                <a:solidFill>
+                  <a:srgbClr val="657422"/>
+                </a:solidFill>
+                <a:latin typeface="Courier"/>
+              </a:rPr>
+              <a:t>alpha =</a:t>
+            </a:r>
+            <a:r>
+              <a:rPr>
+                <a:solidFill>
+                  <a:srgbClr val="003B4F"/>
+                </a:solidFill>
+                <a:latin typeface="Courier"/>
+              </a:rPr>
+              <a:t> </a:t>
+            </a:r>
+            <a:r>
+              <a:rPr>
+                <a:solidFill>
+                  <a:srgbClr val="AD0000"/>
+                </a:solidFill>
+                <a:latin typeface="Courier"/>
+              </a:rPr>
+              <a:t>0.6</a:t>
+            </a:r>
+            <a:r>
+              <a:rPr>
+                <a:solidFill>
+                  <a:srgbClr val="003B4F"/>
+                </a:solidFill>
+                <a:latin typeface="Courier"/>
+              </a:rPr>
+              <a:t>, </a:t>
+            </a:r>
+            <a:r>
+              <a:rPr>
+                <a:solidFill>
+                  <a:srgbClr val="657422"/>
+                </a:solidFill>
+                <a:latin typeface="Courier"/>
+              </a:rPr>
+              <a:t>size =</a:t>
+            </a:r>
+            <a:r>
+              <a:rPr>
+                <a:solidFill>
+                  <a:srgbClr val="003B4F"/>
+                </a:solidFill>
+                <a:latin typeface="Courier"/>
+              </a:rPr>
+              <a:t> </a:t>
+            </a:r>
+            <a:r>
+              <a:rPr>
+                <a:solidFill>
+                  <a:srgbClr val="AD0000"/>
+                </a:solidFill>
+                <a:latin typeface="Courier"/>
+              </a:rPr>
+              <a:t>2</a:t>
+            </a:r>
+            <a:r>
+              <a:rPr>
+                <a:solidFill>
+                  <a:srgbClr val="003B4F"/>
+                </a:solidFill>
+                <a:latin typeface="Courier"/>
+              </a:rPr>
+              <a:t>) </a:t>
+            </a:r>
+            <a:r>
+              <a:rPr>
+                <a:solidFill>
+                  <a:srgbClr val="5E5E5E"/>
+                </a:solidFill>
+                <a:latin typeface="Courier"/>
+              </a:rPr>
+              <a:t>+</a:t>
+            </a:r>
+            <a:br/>
+            <a:r>
+              <a:rPr>
+                <a:solidFill>
+                  <a:srgbClr val="003B4F"/>
+                </a:solidFill>
+                <a:latin typeface="Courier"/>
+              </a:rPr>
+              <a:t>  </a:t>
+            </a:r>
+            <a:r>
+              <a:rPr>
+                <a:solidFill>
+                  <a:srgbClr val="5E5E5E"/>
+                </a:solidFill>
+                <a:latin typeface="Courier"/>
+              </a:rPr>
+              <a:t># Add logistic curve</a:t>
+            </a:r>
+            <a:br/>
+            <a:r>
+              <a:rPr>
+                <a:solidFill>
+                  <a:srgbClr val="003B4F"/>
+                </a:solidFill>
+                <a:latin typeface="Courier"/>
+              </a:rPr>
+              <a:t>  </a:t>
+            </a:r>
+            <a:r>
+              <a:rPr>
+                <a:solidFill>
+                  <a:srgbClr val="4758AB"/>
+                </a:solidFill>
+                <a:latin typeface="Courier"/>
+              </a:rPr>
+              <a:t>geom_line</a:t>
+            </a:r>
+            <a:r>
+              <a:rPr>
+                <a:solidFill>
+                  <a:srgbClr val="003B4F"/>
+                </a:solidFill>
+                <a:latin typeface="Courier"/>
+              </a:rPr>
+              <a:t>(</a:t>
+            </a:r>
+            <a:r>
+              <a:rPr>
+                <a:solidFill>
+                  <a:srgbClr val="657422"/>
+                </a:solidFill>
+                <a:latin typeface="Courier"/>
+              </a:rPr>
+              <a:t>data =</a:t>
+            </a:r>
+            <a:r>
+              <a:rPr>
+                <a:solidFill>
+                  <a:srgbClr val="003B4F"/>
+                </a:solidFill>
+                <a:latin typeface="Courier"/>
+              </a:rPr>
+              <a:t> prediction_df,</a:t>
+            </a:r>
+            <a:br/>
+            <a:r>
+              <a:rPr>
+                <a:solidFill>
+                  <a:srgbClr val="003B4F"/>
+                </a:solidFill>
+                <a:latin typeface="Courier"/>
+              </a:rPr>
+              <a:t>            </a:t>
+            </a:r>
+            <a:r>
+              <a:rPr>
+                <a:solidFill>
+                  <a:srgbClr val="4758AB"/>
+                </a:solidFill>
+                <a:latin typeface="Courier"/>
+              </a:rPr>
+              <a:t>aes</a:t>
+            </a:r>
+            <a:r>
+              <a:rPr>
+                <a:solidFill>
+                  <a:srgbClr val="003B4F"/>
+                </a:solidFill>
+                <a:latin typeface="Courier"/>
+              </a:rPr>
+              <a:t>(</a:t>
+            </a:r>
+            <a:r>
+              <a:rPr>
+                <a:solidFill>
+                  <a:srgbClr val="657422"/>
+                </a:solidFill>
+                <a:latin typeface="Courier"/>
+              </a:rPr>
+              <a:t>x =</a:t>
+            </a:r>
+            <a:r>
+              <a:rPr>
+                <a:solidFill>
+                  <a:srgbClr val="003B4F"/>
+                </a:solidFill>
+                <a:latin typeface="Courier"/>
+              </a:rPr>
+              <a:t> length, </a:t>
+            </a:r>
+            <a:r>
+              <a:rPr>
+                <a:solidFill>
+                  <a:srgbClr val="657422"/>
+                </a:solidFill>
+                <a:latin typeface="Courier"/>
+              </a:rPr>
+              <a:t>y =</a:t>
+            </a:r>
+            <a:r>
+              <a:rPr>
+                <a:solidFill>
+                  <a:srgbClr val="003B4F"/>
+                </a:solidFill>
+                <a:latin typeface="Courier"/>
+              </a:rPr>
+              <a:t> probability),</a:t>
+            </a:r>
+            <a:br/>
+            <a:r>
+              <a:rPr>
+                <a:solidFill>
+                  <a:srgbClr val="003B4F"/>
+                </a:solidFill>
+                <a:latin typeface="Courier"/>
+              </a:rPr>
+              <a:t>            </a:t>
+            </a:r>
+            <a:r>
+              <a:rPr>
+                <a:solidFill>
+                  <a:srgbClr val="657422"/>
+                </a:solidFill>
+                <a:latin typeface="Courier"/>
+              </a:rPr>
+              <a:t>color =</a:t>
+            </a:r>
+            <a:r>
+              <a:rPr>
+                <a:solidFill>
+                  <a:srgbClr val="003B4F"/>
+                </a:solidFill>
+                <a:latin typeface="Courier"/>
+              </a:rPr>
+              <a:t> </a:t>
+            </a:r>
+            <a:r>
+              <a:rPr>
+                <a:solidFill>
+                  <a:srgbClr val="20794D"/>
+                </a:solidFill>
+                <a:latin typeface="Courier"/>
+              </a:rPr>
+              <a:t>"red"</a:t>
+            </a:r>
+            <a:r>
+              <a:rPr>
+                <a:solidFill>
+                  <a:srgbClr val="003B4F"/>
+                </a:solidFill>
+                <a:latin typeface="Courier"/>
+              </a:rPr>
+              <a:t>, </a:t>
+            </a:r>
+            <a:r>
+              <a:rPr>
+                <a:solidFill>
+                  <a:srgbClr val="657422"/>
+                </a:solidFill>
+                <a:latin typeface="Courier"/>
+              </a:rPr>
+              <a:t>size =</a:t>
+            </a:r>
+            <a:r>
+              <a:rPr>
+                <a:solidFill>
+                  <a:srgbClr val="003B4F"/>
+                </a:solidFill>
+                <a:latin typeface="Courier"/>
+              </a:rPr>
+              <a:t> </a:t>
+            </a:r>
+            <a:r>
+              <a:rPr>
+                <a:solidFill>
+                  <a:srgbClr val="AD0000"/>
+                </a:solidFill>
+                <a:latin typeface="Courier"/>
+              </a:rPr>
+              <a:t>1.2</a:t>
+            </a:r>
+            <a:r>
+              <a:rPr>
+                <a:solidFill>
+                  <a:srgbClr val="003B4F"/>
+                </a:solidFill>
+                <a:latin typeface="Courier"/>
+              </a:rPr>
+              <a:t>) </a:t>
+            </a:r>
+            <a:r>
+              <a:rPr>
+                <a:solidFill>
+                  <a:srgbClr val="5E5E5E"/>
+                </a:solidFill>
+                <a:latin typeface="Courier"/>
+              </a:rPr>
+              <a:t>+</a:t>
+            </a:r>
+            <a:br/>
+            <a:r>
+              <a:rPr>
+                <a:solidFill>
+                  <a:srgbClr val="003B4F"/>
+                </a:solidFill>
+                <a:latin typeface="Courier"/>
+              </a:rPr>
+              <a:t>  </a:t>
+            </a:r>
+            <a:r>
+              <a:rPr>
+                <a:solidFill>
+                  <a:srgbClr val="4758AB"/>
+                </a:solidFill>
+                <a:latin typeface="Courier"/>
+              </a:rPr>
+              <a:t>labs</a:t>
+            </a:r>
+            <a:r>
+              <a:rPr>
+                <a:solidFill>
+                  <a:srgbClr val="003B4F"/>
+                </a:solidFill>
+                <a:latin typeface="Courier"/>
+              </a:rPr>
+              <a:t>(</a:t>
+            </a:r>
+            <a:r>
+              <a:rPr>
+                <a:solidFill>
+                  <a:srgbClr val="657422"/>
+                </a:solidFill>
+                <a:latin typeface="Courier"/>
+              </a:rPr>
+              <a:t>title =</a:t>
+            </a:r>
+            <a:r>
+              <a:rPr>
+                <a:solidFill>
+                  <a:srgbClr val="003B4F"/>
+                </a:solidFill>
+                <a:latin typeface="Courier"/>
+              </a:rPr>
+              <a:t> </a:t>
+            </a:r>
+            <a:r>
+              <a:rPr>
+                <a:solidFill>
+                  <a:srgbClr val="20794D"/>
+                </a:solidFill>
+                <a:latin typeface="Courier"/>
+              </a:rPr>
+              <a:t>"Probability of Sexual Maturity vs Body Length"</a:t>
+            </a:r>
+            <a:r>
+              <a:rPr>
+                <a:solidFill>
+                  <a:srgbClr val="003B4F"/>
+                </a:solidFill>
+                <a:latin typeface="Courier"/>
+              </a:rPr>
+              <a:t>,</a:t>
+            </a:r>
+            <a:br/>
+            <a:r>
+              <a:rPr>
+                <a:solidFill>
+                  <a:srgbClr val="003B4F"/>
+                </a:solidFill>
+                <a:latin typeface="Courier"/>
+              </a:rPr>
+              <a:t>       </a:t>
+            </a:r>
+            <a:r>
+              <a:rPr>
+                <a:solidFill>
+                  <a:srgbClr val="657422"/>
+                </a:solidFill>
+                <a:latin typeface="Courier"/>
+              </a:rPr>
+              <a:t>x =</a:t>
+            </a:r>
+            <a:r>
+              <a:rPr>
+                <a:solidFill>
+                  <a:srgbClr val="003B4F"/>
+                </a:solidFill>
+                <a:latin typeface="Courier"/>
+              </a:rPr>
+              <a:t> </a:t>
+            </a:r>
+            <a:r>
+              <a:rPr>
+                <a:solidFill>
+                  <a:srgbClr val="20794D"/>
+                </a:solidFill>
+                <a:latin typeface="Courier"/>
+              </a:rPr>
+              <a:t>"Body Length (cm)"</a:t>
+            </a:r>
+            <a:r>
+              <a:rPr>
+                <a:solidFill>
+                  <a:srgbClr val="003B4F"/>
+                </a:solidFill>
+                <a:latin typeface="Courier"/>
+              </a:rPr>
+              <a:t>,</a:t>
+            </a:r>
+            <a:br/>
+            <a:r>
+              <a:rPr>
+                <a:solidFill>
+                  <a:srgbClr val="003B4F"/>
+                </a:solidFill>
+                <a:latin typeface="Courier"/>
+              </a:rPr>
+              <a:t>       </a:t>
+            </a:r>
+            <a:r>
+              <a:rPr>
+                <a:solidFill>
+                  <a:srgbClr val="657422"/>
+                </a:solidFill>
+                <a:latin typeface="Courier"/>
+              </a:rPr>
+              <a:t>y =</a:t>
+            </a:r>
+            <a:r>
+              <a:rPr>
+                <a:solidFill>
+                  <a:srgbClr val="003B4F"/>
+                </a:solidFill>
+                <a:latin typeface="Courier"/>
+              </a:rPr>
+              <a:t> </a:t>
+            </a:r>
+            <a:r>
+              <a:rPr>
+                <a:solidFill>
+                  <a:srgbClr val="20794D"/>
+                </a:solidFill>
+                <a:latin typeface="Courier"/>
+              </a:rPr>
+              <a:t>"Probability of Being Sexually Mature"</a:t>
+            </a:r>
+            <a:r>
+              <a:rPr>
+                <a:solidFill>
+                  <a:srgbClr val="003B4F"/>
+                </a:solidFill>
+                <a:latin typeface="Courier"/>
+              </a:rPr>
+              <a:t>) </a:t>
+            </a:r>
+            <a:r>
+              <a:rPr>
+                <a:solidFill>
+                  <a:srgbClr val="5E5E5E"/>
+                </a:solidFill>
+                <a:latin typeface="Courier"/>
+              </a:rPr>
+              <a:t>+</a:t>
+            </a:r>
+            <a:br/>
+            <a:r>
+              <a:rPr>
+                <a:solidFill>
+                  <a:srgbClr val="003B4F"/>
+                </a:solidFill>
+                <a:latin typeface="Courier"/>
+              </a:rPr>
+              <a:t>  </a:t>
+            </a:r>
+            <a:r>
+              <a:rPr>
+                <a:solidFill>
+                  <a:srgbClr val="4758AB"/>
+                </a:solidFill>
+                <a:latin typeface="Courier"/>
+              </a:rPr>
+              <a:t>theme_minimal</a:t>
+            </a:r>
+            <a:r>
+              <a:rPr>
+                <a:solidFill>
+                  <a:srgbClr val="003B4F"/>
+                </a:solidFill>
+                <a:latin typeface="Courier"/>
+              </a:rPr>
+              <a:t>()</a:t>
+            </a:r>
+            <a:br/>
+            <a:br/>
+            <a:r>
+              <a:rPr>
+                <a:solidFill>
+                  <a:srgbClr val="003B4F"/>
+                </a:solidFill>
+                <a:latin typeface="Courier"/>
+              </a:rPr>
+              <a:t>logistic_plot</a:t>
+            </a:r>
+          </a:p>
+        </p:txBody>
+      </p:sp>
+      <p:pic>
+        <p:nvPicPr>
+          <p:cNvPr descr="review_lecture_files/figure-pptx/logistic_regression_plot-1.png" id="0" name="Picture 1"/>
+          <p:cNvPicPr>
+            <a:picLocks noGrp="1" noChangeAspect="1"/>
+          </p:cNvPicPr>
+          <p:nvPr/>
+        </p:nvPicPr>
+        <p:blipFill>
+          <a:blip r:embed="rId2"/>
+          <a:stretch>
+            <a:fillRect/>
+          </a:stretch>
+        </p:blipFill>
+        <p:spPr bwMode="auto">
+          <a:xfrm>
+            <a:off x="4368800" y="952500"/>
+            <a:ext cx="3797300" cy="3797300"/>
+          </a:xfrm>
+          <a:prstGeom prst="rect">
+            <a:avLst/>
+          </a:prstGeom>
+          <a:noFill/>
+          <a:ln w="9525">
+            <a:noFill/>
+            <a:headEnd/>
+            <a:tailEnd/>
+          </a:ln>
+        </p:spPr>
+      </p:pic>
+    </p:spTree>
+  </p:cSld>
+</p:sld>
+</file>
+
+<file path=ppt/slides/slide17.xml><?xml version="1.0" encoding="utf-8"?>
+<p:sld xmlns:a="http://schemas.openxmlformats.org/drawingml/2006/main" xmlns:r="http://schemas.openxmlformats.org/officeDocument/2006/relationships" xmlns:p="http://schemas.openxmlformats.org/presentationml/2006/main">
+  <p:cSld>
+    <p:spTree>
+      <p:nvGrpSpPr>
+        <p:cNvPr id="1" name=""/>
+        <p:cNvGrpSpPr/>
+        <p:nvPr/>
+      </p:nvGrpSpPr>
+      <p:grpSpPr>
+        <a:xfrm>
+          <a:off x="0" y="0"/>
+          <a:ext cx="0" cy="0"/>
+          <a:chOff x="0" y="0"/>
+          <a:chExt cx="0" cy="0"/>
+        </a:xfrm>
+      </p:grpSpPr>
+      <p:sp>
+        <p:nvSpPr>
+          <p:cNvPr id="2" name="Title 1"/>
+          <p:cNvSpPr>
+            <a:spLocks noGrp="1"/>
+          </p:cNvSpPr>
+          <p:nvPr>
+            <p:ph type="title"/>
+          </p:nvPr>
+        </p:nvSpPr>
+        <p:spPr>
+          <a:xfrm>
+            <a:off x="0" y="0"/>
+            <a:ext cx="9144000" cy="582780"/>
+          </a:xfrm>
+        </p:spPr>
+        <p:txBody>
+          <a:bodyPr/>
+          <a:lstStyle/>
+          <a:p>
+            <a:pPr lvl="0" indent="0" marL="0">
+              <a:buNone/>
+            </a:pPr>
+            <a:r>
+              <a:rPr b="1"/>
+              <a:t>What the S-curve tells us:</a:t>
+            </a:r>
+          </a:p>
+        </p:txBody>
+      </p:sp>
+      <p:sp>
+        <p:nvSpPr>
+          <p:cNvPr id="3" name="Content Placeholder 2"/>
+          <p:cNvSpPr>
+            <a:spLocks noGrp="1"/>
+          </p:cNvSpPr>
+          <p:nvPr>
+            <p:ph idx="1"/>
+          </p:nvPr>
+        </p:nvSpPr>
+        <p:spPr/>
+        <p:txBody>
+          <a:bodyPr/>
+          <a:lstStyle/>
+          <a:p>
+            <a:pPr lvl="0"/>
             <a:r>
               <a:rPr/>
-              <a:t> models probability of binary outcomes</a:t>
-            </a:r>
-          </a:p>
-          <a:p>
-            <a:pPr lvl="0" indent="-342900" marL="342900">
-              <a:buAutoNum type="arabicPeriod"/>
+              <a:t>The red line shows how probability changes with length</a:t>
+            </a:r>
+          </a:p>
+          <a:p>
+            <a:pPr lvl="0"/>
+            <a:r>
+              <a:rPr/>
+              <a:t>Small lizards (&lt;20 cm) have very low probability of being mature</a:t>
+            </a:r>
+          </a:p>
+          <a:p>
+            <a:pPr lvl="0"/>
+            <a:r>
+              <a:rPr/>
+              <a:t>Large lizards (&gt;40 cm) have very high probability of being mature</a:t>
+            </a:r>
+          </a:p>
+          <a:p>
+            <a:pPr lvl="0"/>
+            <a:r>
+              <a:rPr/>
+              <a:t>The steepest change occurs around 25-30 cm</a:t>
+            </a:r>
+          </a:p>
+        </p:txBody>
+      </p:sp>
+    </p:spTree>
+  </p:cSld>
+</p:sld>
+</file>
+
+<file path=ppt/slides/slide18.xml><?xml version="1.0" encoding="utf-8"?>
+<p:sld xmlns:a="http://schemas.openxmlformats.org/drawingml/2006/main" xmlns:r="http://schemas.openxmlformats.org/officeDocument/2006/relationships" xmlns:p="http://schemas.openxmlformats.org/presentationml/2006/main">
+  <p:cSld>
+    <p:spTree>
+      <p:nvGrpSpPr>
+        <p:cNvPr id="1" name=""/>
+        <p:cNvGrpSpPr/>
+        <p:nvPr/>
+      </p:nvGrpSpPr>
+      <p:grpSpPr>
+        <a:xfrm>
+          <a:off x="0" y="0"/>
+          <a:ext cx="0" cy="0"/>
+          <a:chOff x="0" y="0"/>
+          <a:chExt cx="0" cy="0"/>
+        </a:xfrm>
+      </p:grpSpPr>
+      <p:sp>
+        <p:nvSpPr>
+          <p:cNvPr id="2" name="Title 1"/>
+          <p:cNvSpPr>
+            <a:spLocks noGrp="1"/>
+          </p:cNvSpPr>
+          <p:nvPr>
+            <p:ph type="title"/>
+          </p:nvPr>
+        </p:nvSpPr>
+        <p:spPr>
+          <a:xfrm>
+            <a:off x="0" y="0"/>
+            <a:ext cx="9144000" cy="582780"/>
+          </a:xfrm>
+        </p:spPr>
+        <p:txBody>
+          <a:bodyPr/>
+          <a:lstStyle/>
+          <a:p>
+            <a:pPr lvl="0" indent="0" marL="0">
+              <a:buNone/>
             </a:pPr>
             <a:r>
               <a:rPr/>
-              <a:t>Uses </a:t>
-            </a:r>
+              <a:t>Step 6: Making Predictions</a:t>
+            </a:r>
+          </a:p>
+        </p:txBody>
+      </p:sp>
+    </p:spTree>
+  </p:cSld>
+</p:sld>
+</file>
+
+<file path=ppt/slides/slide19.xml><?xml version="1.0" encoding="utf-8"?>
+<p:sld xmlns:a="http://schemas.openxmlformats.org/drawingml/2006/main" xmlns:r="http://schemas.openxmlformats.org/officeDocument/2006/relationships" xmlns:p="http://schemas.openxmlformats.org/presentationml/2006/main">
+  <p:cSld>
+    <p:spTree>
+      <p:nvGrpSpPr>
+        <p:cNvPr id="1" name=""/>
+        <p:cNvGrpSpPr/>
+        <p:nvPr/>
+      </p:nvGrpSpPr>
+      <p:grpSpPr>
+        <a:xfrm>
+          <a:off x="0" y="0"/>
+          <a:ext cx="0" cy="0"/>
+          <a:chOff x="0" y="0"/>
+          <a:chExt cx="0" cy="0"/>
+        </a:xfrm>
+      </p:grpSpPr>
+      <p:sp>
+        <p:nvSpPr>
+          <p:cNvPr id="2" name="Title 1"/>
+          <p:cNvSpPr>
+            <a:spLocks noGrp="1"/>
+          </p:cNvSpPr>
+          <p:nvPr>
+            <p:ph type="title"/>
+          </p:nvPr>
+        </p:nvSpPr>
+        <p:spPr>
+          <a:xfrm>
+            <a:off x="0" y="0"/>
+            <a:ext cx="9144000" cy="582780"/>
+          </a:xfrm>
+        </p:spPr>
+        <p:txBody>
+          <a:bodyPr/>
+          <a:lstStyle/>
+          <a:p>
+            <a:pPr lvl="0" indent="0" marL="0">
+              <a:buNone/>
+            </a:pPr>
             <a:r>
               <a:rPr b="1"/>
-              <a:t>glm()</a:t>
-            </a:r>
+              <a:t>Using the Model for Prediction</a:t>
+            </a:r>
+          </a:p>
+        </p:txBody>
+      </p:sp>
+      <p:sp>
+        <p:nvSpPr>
+          <p:cNvPr id="3" name="Content Placeholder 2"/>
+          <p:cNvSpPr>
+            <a:spLocks noGrp="1"/>
+          </p:cNvSpPr>
+          <p:nvPr>
+            <p:ph idx="1"/>
+          </p:nvPr>
+        </p:nvSpPr>
+        <p:spPr/>
+        <p:txBody>
+          <a:bodyPr/>
+          <a:lstStyle/>
+          <a:p>
+            <a:pPr lvl="0" indent="0" marL="0">
+              <a:buNone/>
+            </a:pPr>
             <a:r>
               <a:rPr/>
-              <a:t> with </a:t>
-            </a:r>
-            <a:r>
-              <a:rPr>
-                <a:latin typeface="Courier"/>
-              </a:rPr>
-              <a:t>family = binomial</a:t>
-            </a:r>
-          </a:p>
-          <a:p>
-            <a:pPr lvl="0" indent="-342900" marL="342900">
-              <a:buAutoNum type="arabicPeriod"/>
+              <a:t>Let’s predict the probability of sexual maturity for specific lizard sizes:</a:t>
+            </a:r>
+          </a:p>
+          <a:p>
+            <a:pPr lvl="0" indent="0">
+              <a:buNone/>
             </a:pPr>
             <a:r>
-              <a:rPr/>
-              <a:t>Coefficients represent changes in </a:t>
-            </a:r>
-            <a:r>
-              <a:rPr b="1"/>
-              <a:t>log-odds</a:t>
-            </a:r>
-          </a:p>
-          <a:p>
-            <a:pPr lvl="0" indent="-342900" marL="342900">
-              <a:buAutoNum type="arabicPeriod"/>
-            </a:pPr>
-            <a:r>
-              <a:rPr/>
-              <a:t>Convert to </a:t>
-            </a:r>
-            <a:r>
-              <a:rPr b="1"/>
-              <a:t>odds ratios</a:t>
-            </a:r>
-            <a:r>
-              <a:rPr/>
-              <a:t> for interpretation: exp(coefficient)</a:t>
-            </a:r>
-          </a:p>
-          <a:p>
-            <a:pPr lvl="0" indent="-342900" marL="342900">
-              <a:buAutoNum type="arabicPeriod"/>
-            </a:pPr>
-            <a:r>
-              <a:rPr/>
-              <a:t>Creates </a:t>
-            </a:r>
-            <a:r>
-              <a:rPr b="1"/>
-              <a:t>S-shaped probability curves</a:t>
-            </a:r>
-          </a:p>
-          <a:p>
-            <a:pPr lvl="0" indent="-342900" marL="342900">
-              <a:buAutoNum type="arabicPeriod"/>
-            </a:pPr>
-            <a:r>
-              <a:rPr/>
-              <a:t>Use </a:t>
-            </a:r>
-            <a:r>
-              <a:rPr b="1"/>
-              <a:t>pseudo-R²</a:t>
-            </a:r>
-            <a:r>
-              <a:rPr/>
-              <a:t> to assess model fit</a:t>
-            </a:r>
-          </a:p>
-          <a:p>
-            <a:pPr lvl="0" indent="0" marL="0">
-              <a:spcBef>
-                <a:spcPts val="3000"/>
-              </a:spcBef>
-              <a:buNone/>
-            </a:pPr>
-            <a:r>
-              <a:rPr b="1"/>
-              <a:t>Our Results:</a:t>
-            </a:r>
-          </a:p>
-          <a:p>
-            <a:pPr lvl="0"/>
-            <a:r>
-              <a:rPr/>
-              <a:t>Significant positive relationship between body length and sexual maturity</a:t>
-            </a:r>
-          </a:p>
-          <a:p>
-            <a:pPr lvl="0"/>
-            <a:r>
-              <a:rPr/>
-              <a:t>Each 1 cm increase in length increases odds of maturity by ~28%</a:t>
-            </a:r>
-          </a:p>
-          <a:p>
-            <a:pPr lvl="0"/>
-            <a:r>
-              <a:rPr/>
-              <a:t>Model explains ~40-50% of variation in maturity status</a:t>
-            </a:r>
-          </a:p>
-          <a:p>
-            <a:pPr lvl="0"/>
-            <a:r>
-              <a:rPr/>
-              <a:t>Can predict probability of maturity for any given length</a:t>
-            </a:r>
-          </a:p>
-          <a:p>
-            <a:pPr lvl="0" indent="0" marL="0">
-              <a:spcBef>
-                <a:spcPts val="3000"/>
-              </a:spcBef>
-              <a:buNone/>
-            </a:pPr>
-            <a:r>
-              <a:rPr b="1"/>
-              <a:t>When to Use Logistic Regression:</a:t>
-            </a:r>
-          </a:p>
-          <a:p>
-            <a:pPr lvl="0"/>
-            <a:r>
-              <a:rPr/>
-              <a:t>Binary response variable (0/1, yes/no, success/failure)</a:t>
-            </a:r>
-          </a:p>
-          <a:p>
-            <a:pPr lvl="0"/>
-            <a:r>
-              <a:rPr/>
-              <a:t>Want to predict probabilities</a:t>
-            </a:r>
-          </a:p>
-          <a:p>
-            <a:pPr lvl="0"/>
-            <a:r>
-              <a:rPr/>
-              <a:t>Relationships that follow S-shaped curves</a:t>
-            </a:r>
-          </a:p>
-          <a:p>
-            <a:pPr lvl="0"/>
-            <a:r>
-              <a:rPr/>
-              <a:t>When assumptions of linear regression are violated</a:t>
+              <a:rPr>
+                <a:solidFill>
+                  <a:srgbClr val="5E5E5E"/>
+                </a:solidFill>
+                <a:latin typeface="Courier"/>
+              </a:rPr>
+              <a:t># Predict for a 20 cm lizard</a:t>
+            </a:r>
+            <a:br/>
+            <a:r>
+              <a:rPr>
+                <a:solidFill>
+                  <a:srgbClr val="003B4F"/>
+                </a:solidFill>
+                <a:latin typeface="Courier"/>
+              </a:rPr>
+              <a:t>prob_20cm &lt;- </a:t>
+            </a:r>
+            <a:r>
+              <a:rPr>
+                <a:solidFill>
+                  <a:srgbClr val="4758AB"/>
+                </a:solidFill>
+                <a:latin typeface="Courier"/>
+              </a:rPr>
+              <a:t>predict</a:t>
+            </a:r>
+            <a:r>
+              <a:rPr>
+                <a:solidFill>
+                  <a:srgbClr val="003B4F"/>
+                </a:solidFill>
+                <a:latin typeface="Courier"/>
+              </a:rPr>
+              <a:t>(logistic_model, </a:t>
+            </a:r>
+            <a:br/>
+            <a:r>
+              <a:rPr>
+                <a:solidFill>
+                  <a:srgbClr val="003B4F"/>
+                </a:solidFill>
+                <a:latin typeface="Courier"/>
+              </a:rPr>
+              <a:t>                     </a:t>
+            </a:r>
+            <a:r>
+              <a:rPr>
+                <a:solidFill>
+                  <a:srgbClr val="4758AB"/>
+                </a:solidFill>
+                <a:latin typeface="Courier"/>
+              </a:rPr>
+              <a:t>list</a:t>
+            </a:r>
+            <a:r>
+              <a:rPr>
+                <a:solidFill>
+                  <a:srgbClr val="003B4F"/>
+                </a:solidFill>
+                <a:latin typeface="Courier"/>
+              </a:rPr>
+              <a:t>(</a:t>
+            </a:r>
+            <a:r>
+              <a:rPr>
+                <a:solidFill>
+                  <a:srgbClr val="657422"/>
+                </a:solidFill>
+                <a:latin typeface="Courier"/>
+              </a:rPr>
+              <a:t>length =</a:t>
+            </a:r>
+            <a:r>
+              <a:rPr>
+                <a:solidFill>
+                  <a:srgbClr val="003B4F"/>
+                </a:solidFill>
+                <a:latin typeface="Courier"/>
+              </a:rPr>
+              <a:t> </a:t>
+            </a:r>
+            <a:r>
+              <a:rPr>
+                <a:solidFill>
+                  <a:srgbClr val="AD0000"/>
+                </a:solidFill>
+                <a:latin typeface="Courier"/>
+              </a:rPr>
+              <a:t>20</a:t>
+            </a:r>
+            <a:r>
+              <a:rPr>
+                <a:solidFill>
+                  <a:srgbClr val="003B4F"/>
+                </a:solidFill>
+                <a:latin typeface="Courier"/>
+              </a:rPr>
+              <a:t>), </a:t>
+            </a:r>
+            <a:br/>
+            <a:r>
+              <a:rPr>
+                <a:solidFill>
+                  <a:srgbClr val="003B4F"/>
+                </a:solidFill>
+                <a:latin typeface="Courier"/>
+              </a:rPr>
+              <a:t>                     </a:t>
+            </a:r>
+            <a:r>
+              <a:rPr>
+                <a:solidFill>
+                  <a:srgbClr val="657422"/>
+                </a:solidFill>
+                <a:latin typeface="Courier"/>
+              </a:rPr>
+              <a:t>type =</a:t>
+            </a:r>
+            <a:r>
+              <a:rPr>
+                <a:solidFill>
+                  <a:srgbClr val="003B4F"/>
+                </a:solidFill>
+                <a:latin typeface="Courier"/>
+              </a:rPr>
+              <a:t> </a:t>
+            </a:r>
+            <a:r>
+              <a:rPr>
+                <a:solidFill>
+                  <a:srgbClr val="20794D"/>
+                </a:solidFill>
+                <a:latin typeface="Courier"/>
+              </a:rPr>
+              <a:t>"response"</a:t>
+            </a:r>
+            <a:r>
+              <a:rPr>
+                <a:solidFill>
+                  <a:srgbClr val="003B4F"/>
+                </a:solidFill>
+                <a:latin typeface="Courier"/>
+              </a:rPr>
+              <a:t>)</a:t>
+            </a:r>
+            <a:br/>
+            <a:r>
+              <a:rPr>
+                <a:solidFill>
+                  <a:srgbClr val="003B4F"/>
+                </a:solidFill>
+                <a:latin typeface="Courier"/>
+              </a:rPr>
+              <a:t>prob_20cm</a:t>
+            </a:r>
+            <a:br/>
+            <a:r>
+              <a:rPr i="1">
+                <a:solidFill>
+                  <a:srgbClr val="5E5E5E"/>
+                </a:solidFill>
+                <a:latin typeface="Courier"/>
+              </a:rPr>
+              <a:t>##         1 </a:t>
+            </a:r>
+            <a:br/>
+            <a:r>
+              <a:rPr i="1">
+                <a:solidFill>
+                  <a:srgbClr val="5E5E5E"/>
+                </a:solidFill>
+                <a:latin typeface="Courier"/>
+              </a:rPr>
+              <a:t>## 0.1565304</a:t>
+            </a:r>
+            <a:br/>
+            <a:br/>
+            <a:r>
+              <a:rPr>
+                <a:solidFill>
+                  <a:srgbClr val="5E5E5E"/>
+                </a:solidFill>
+                <a:latin typeface="Courier"/>
+              </a:rPr>
+              <a:t># Predict for a 30 cm lizard</a:t>
+            </a:r>
+            <a:br/>
+            <a:r>
+              <a:rPr>
+                <a:solidFill>
+                  <a:srgbClr val="003B4F"/>
+                </a:solidFill>
+                <a:latin typeface="Courier"/>
+              </a:rPr>
+              <a:t>prob_30cm &lt;- </a:t>
+            </a:r>
+            <a:r>
+              <a:rPr>
+                <a:solidFill>
+                  <a:srgbClr val="4758AB"/>
+                </a:solidFill>
+                <a:latin typeface="Courier"/>
+              </a:rPr>
+              <a:t>predict</a:t>
+            </a:r>
+            <a:r>
+              <a:rPr>
+                <a:solidFill>
+                  <a:srgbClr val="003B4F"/>
+                </a:solidFill>
+                <a:latin typeface="Courier"/>
+              </a:rPr>
+              <a:t>(logistic_model, </a:t>
+            </a:r>
+            <a:br/>
+            <a:r>
+              <a:rPr>
+                <a:solidFill>
+                  <a:srgbClr val="003B4F"/>
+                </a:solidFill>
+                <a:latin typeface="Courier"/>
+              </a:rPr>
+              <a:t>                     </a:t>
+            </a:r>
+            <a:r>
+              <a:rPr>
+                <a:solidFill>
+                  <a:srgbClr val="4758AB"/>
+                </a:solidFill>
+                <a:latin typeface="Courier"/>
+              </a:rPr>
+              <a:t>list</a:t>
+            </a:r>
+            <a:r>
+              <a:rPr>
+                <a:solidFill>
+                  <a:srgbClr val="003B4F"/>
+                </a:solidFill>
+                <a:latin typeface="Courier"/>
+              </a:rPr>
+              <a:t>(</a:t>
+            </a:r>
+            <a:r>
+              <a:rPr>
+                <a:solidFill>
+                  <a:srgbClr val="657422"/>
+                </a:solidFill>
+                <a:latin typeface="Courier"/>
+              </a:rPr>
+              <a:t>length =</a:t>
+            </a:r>
+            <a:r>
+              <a:rPr>
+                <a:solidFill>
+                  <a:srgbClr val="003B4F"/>
+                </a:solidFill>
+                <a:latin typeface="Courier"/>
+              </a:rPr>
+              <a:t> </a:t>
+            </a:r>
+            <a:r>
+              <a:rPr>
+                <a:solidFill>
+                  <a:srgbClr val="AD0000"/>
+                </a:solidFill>
+                <a:latin typeface="Courier"/>
+              </a:rPr>
+              <a:t>30</a:t>
+            </a:r>
+            <a:r>
+              <a:rPr>
+                <a:solidFill>
+                  <a:srgbClr val="003B4F"/>
+                </a:solidFill>
+                <a:latin typeface="Courier"/>
+              </a:rPr>
+              <a:t>), </a:t>
+            </a:r>
+            <a:br/>
+            <a:r>
+              <a:rPr>
+                <a:solidFill>
+                  <a:srgbClr val="003B4F"/>
+                </a:solidFill>
+                <a:latin typeface="Courier"/>
+              </a:rPr>
+              <a:t>                     </a:t>
+            </a:r>
+            <a:r>
+              <a:rPr>
+                <a:solidFill>
+                  <a:srgbClr val="657422"/>
+                </a:solidFill>
+                <a:latin typeface="Courier"/>
+              </a:rPr>
+              <a:t>type =</a:t>
+            </a:r>
+            <a:r>
+              <a:rPr>
+                <a:solidFill>
+                  <a:srgbClr val="003B4F"/>
+                </a:solidFill>
+                <a:latin typeface="Courier"/>
+              </a:rPr>
+              <a:t> </a:t>
+            </a:r>
+            <a:r>
+              <a:rPr>
+                <a:solidFill>
+                  <a:srgbClr val="20794D"/>
+                </a:solidFill>
+                <a:latin typeface="Courier"/>
+              </a:rPr>
+              <a:t>"response"</a:t>
+            </a:r>
+            <a:r>
+              <a:rPr>
+                <a:solidFill>
+                  <a:srgbClr val="003B4F"/>
+                </a:solidFill>
+                <a:latin typeface="Courier"/>
+              </a:rPr>
+              <a:t>)</a:t>
+            </a:r>
+            <a:br/>
+            <a:r>
+              <a:rPr>
+                <a:solidFill>
+                  <a:srgbClr val="003B4F"/>
+                </a:solidFill>
+                <a:latin typeface="Courier"/>
+              </a:rPr>
+              <a:t>prob_30cm</a:t>
+            </a:r>
+            <a:br/>
+            <a:r>
+              <a:rPr i="1">
+                <a:solidFill>
+                  <a:srgbClr val="5E5E5E"/>
+                </a:solidFill>
+                <a:latin typeface="Courier"/>
+              </a:rPr>
+              <a:t>##         1 </a:t>
+            </a:r>
+            <a:br/>
+            <a:r>
+              <a:rPr i="1">
+                <a:solidFill>
+                  <a:srgbClr val="5E5E5E"/>
+                </a:solidFill>
+                <a:latin typeface="Courier"/>
+              </a:rPr>
+              <a:t>## 0.6939292</a:t>
+            </a:r>
+            <a:br/>
+            <a:br/>
+            <a:r>
+              <a:rPr>
+                <a:solidFill>
+                  <a:srgbClr val="5E5E5E"/>
+                </a:solidFill>
+                <a:latin typeface="Courier"/>
+              </a:rPr>
+              <a:t># Predict for a 40 cm lizard</a:t>
+            </a:r>
+            <a:br/>
+            <a:r>
+              <a:rPr>
+                <a:solidFill>
+                  <a:srgbClr val="003B4F"/>
+                </a:solidFill>
+                <a:latin typeface="Courier"/>
+              </a:rPr>
+              <a:t>prob_40cm &lt;- </a:t>
+            </a:r>
+            <a:r>
+              <a:rPr>
+                <a:solidFill>
+                  <a:srgbClr val="4758AB"/>
+                </a:solidFill>
+                <a:latin typeface="Courier"/>
+              </a:rPr>
+              <a:t>predict</a:t>
+            </a:r>
+            <a:r>
+              <a:rPr>
+                <a:solidFill>
+                  <a:srgbClr val="003B4F"/>
+                </a:solidFill>
+                <a:latin typeface="Courier"/>
+              </a:rPr>
+              <a:t>(logistic_model, </a:t>
+            </a:r>
+            <a:br/>
+            <a:r>
+              <a:rPr>
+                <a:solidFill>
+                  <a:srgbClr val="003B4F"/>
+                </a:solidFill>
+                <a:latin typeface="Courier"/>
+              </a:rPr>
+              <a:t>                     </a:t>
+            </a:r>
+            <a:r>
+              <a:rPr>
+                <a:solidFill>
+                  <a:srgbClr val="4758AB"/>
+                </a:solidFill>
+                <a:latin typeface="Courier"/>
+              </a:rPr>
+              <a:t>list</a:t>
+            </a:r>
+            <a:r>
+              <a:rPr>
+                <a:solidFill>
+                  <a:srgbClr val="003B4F"/>
+                </a:solidFill>
+                <a:latin typeface="Courier"/>
+              </a:rPr>
+              <a:t>(</a:t>
+            </a:r>
+            <a:r>
+              <a:rPr>
+                <a:solidFill>
+                  <a:srgbClr val="657422"/>
+                </a:solidFill>
+                <a:latin typeface="Courier"/>
+              </a:rPr>
+              <a:t>length =</a:t>
+            </a:r>
+            <a:r>
+              <a:rPr>
+                <a:solidFill>
+                  <a:srgbClr val="003B4F"/>
+                </a:solidFill>
+                <a:latin typeface="Courier"/>
+              </a:rPr>
+              <a:t> </a:t>
+            </a:r>
+            <a:r>
+              <a:rPr>
+                <a:solidFill>
+                  <a:srgbClr val="AD0000"/>
+                </a:solidFill>
+                <a:latin typeface="Courier"/>
+              </a:rPr>
+              <a:t>40</a:t>
+            </a:r>
+            <a:r>
+              <a:rPr>
+                <a:solidFill>
+                  <a:srgbClr val="003B4F"/>
+                </a:solidFill>
+                <a:latin typeface="Courier"/>
+              </a:rPr>
+              <a:t>), </a:t>
+            </a:r>
+            <a:br/>
+            <a:r>
+              <a:rPr>
+                <a:solidFill>
+                  <a:srgbClr val="003B4F"/>
+                </a:solidFill>
+                <a:latin typeface="Courier"/>
+              </a:rPr>
+              <a:t>                     </a:t>
+            </a:r>
+            <a:r>
+              <a:rPr>
+                <a:solidFill>
+                  <a:srgbClr val="657422"/>
+                </a:solidFill>
+                <a:latin typeface="Courier"/>
+              </a:rPr>
+              <a:t>type =</a:t>
+            </a:r>
+            <a:r>
+              <a:rPr>
+                <a:solidFill>
+                  <a:srgbClr val="003B4F"/>
+                </a:solidFill>
+                <a:latin typeface="Courier"/>
+              </a:rPr>
+              <a:t> </a:t>
+            </a:r>
+            <a:r>
+              <a:rPr>
+                <a:solidFill>
+                  <a:srgbClr val="20794D"/>
+                </a:solidFill>
+                <a:latin typeface="Courier"/>
+              </a:rPr>
+              <a:t>"response"</a:t>
+            </a:r>
+            <a:r>
+              <a:rPr>
+                <a:solidFill>
+                  <a:srgbClr val="003B4F"/>
+                </a:solidFill>
+                <a:latin typeface="Courier"/>
+              </a:rPr>
+              <a:t>)</a:t>
+            </a:r>
+            <a:br/>
+            <a:r>
+              <a:rPr>
+                <a:solidFill>
+                  <a:srgbClr val="003B4F"/>
+                </a:solidFill>
+                <a:latin typeface="Courier"/>
+              </a:rPr>
+              <a:t>prob_40cm</a:t>
+            </a:r>
+            <a:br/>
+            <a:r>
+              <a:rPr i="1">
+                <a:solidFill>
+                  <a:srgbClr val="5E5E5E"/>
+                </a:solidFill>
+                <a:latin typeface="Courier"/>
+              </a:rPr>
+              <a:t>##         1 </a:t>
+            </a:r>
+            <a:br/>
+            <a:r>
+              <a:rPr i="1">
+                <a:solidFill>
+                  <a:srgbClr val="5E5E5E"/>
+                </a:solidFill>
+                <a:latin typeface="Courier"/>
+              </a:rPr>
+              <a:t>## 0.9651551</a:t>
             </a:r>
           </a:p>
         </p:txBody>
@@ -4097,141 +6320,1891 @@
           </a:p>
         </p:txBody>
       </p:sp>
-      <p:sp>
-        <p:nvSpPr>
-          <p:cNvPr id="3" name="Content Placeholder 2"/>
-          <p:cNvSpPr>
-            <a:spLocks noGrp="1"/>
-          </p:cNvSpPr>
-          <p:nvPr>
-            <p:ph idx="1"/>
-          </p:nvPr>
-        </p:nvSpPr>
-        <p:spPr/>
+    </p:spTree>
+  </p:cSld>
+</p:sld>
+</file>
+
+<file path=ppt/slides/slide20.xml><?xml version="1.0" encoding="utf-8"?>
+<p:sld xmlns:a="http://schemas.openxmlformats.org/drawingml/2006/main" xmlns:r="http://schemas.openxmlformats.org/officeDocument/2006/relationships" xmlns:p="http://schemas.openxmlformats.org/presentationml/2006/main">
+  <p:cSld>
+    <p:spTree>
+      <p:nvGrpSpPr>
+        <p:cNvPr id="1" name=""/>
+        <p:cNvGrpSpPr/>
+        <p:nvPr/>
+      </p:nvGrpSpPr>
+      <p:grpSpPr>
+        <a:xfrm>
+          <a:off x="0" y="0"/>
+          <a:ext cx="0" cy="0"/>
+          <a:chOff x="0" y="0"/>
+          <a:chExt cx="0" cy="0"/>
+        </a:xfrm>
+      </p:grpSpPr>
+      <p:sp>
+        <p:nvSpPr>
+          <p:cNvPr id="2" name="Title 1"/>
+          <p:cNvSpPr>
+            <a:spLocks noGrp="1"/>
+          </p:cNvSpPr>
+          <p:nvPr>
+            <p:ph type="title"/>
+          </p:nvPr>
+        </p:nvSpPr>
+        <p:spPr>
+          <a:xfrm>
+            <a:off x="0" y="0"/>
+            <a:ext cx="9144000" cy="582780"/>
+          </a:xfrm>
+        </p:spPr>
         <p:txBody>
           <a:bodyPr/>
           <a:lstStyle/>
           <a:p>
             <a:pPr lvl="0" indent="0" marL="0">
-              <a:spcBef>
-                <a:spcPts val="3000"/>
-              </a:spcBef>
               <a:buNone/>
             </a:pPr>
             <a:r>
               <a:rPr b="1"/>
-              <a:t>What is Logistic Regression?</a:t>
-            </a:r>
-          </a:p>
+              <a:t>Interpretation:</a:t>
+            </a:r>
+          </a:p>
+        </p:txBody>
+      </p:sp>
+      <p:sp>
+        <p:nvSpPr>
+          <p:cNvPr id="3" name="Content Placeholder 2"/>
+          <p:cNvSpPr>
+            <a:spLocks noGrp="1"/>
+          </p:cNvSpPr>
+          <p:nvPr>
+            <p:ph idx="1"/>
+          </p:nvPr>
+        </p:nvSpPr>
+        <p:spPr/>
+        <p:txBody>
+          <a:bodyPr/>
+          <a:lstStyle/>
+          <a:p>
+            <a:pPr lvl="0"/>
+            <a:r>
+              <a:rPr/>
+              <a:t>A 20 cm lizard has about 14% probability of being sexually mature</a:t>
+            </a:r>
+          </a:p>
+          <a:p>
+            <a:pPr lvl="0"/>
+            <a:r>
+              <a:rPr/>
+              <a:t>A 30 cm lizard has about 70% probability of being sexually mature</a:t>
+            </a:r>
+          </a:p>
+          <a:p>
+            <a:pPr lvl="0"/>
+            <a:r>
+              <a:rPr/>
+              <a:t>A 40 cm lizard has about 96% probability of being sexually mature</a:t>
+            </a:r>
+          </a:p>
+        </p:txBody>
+      </p:sp>
+    </p:spTree>
+  </p:cSld>
+</p:sld>
+</file>
+
+<file path=ppt/slides/slide21.xml><?xml version="1.0" encoding="utf-8"?>
+<p:sld xmlns:a="http://schemas.openxmlformats.org/drawingml/2006/main" xmlns:r="http://schemas.openxmlformats.org/officeDocument/2006/relationships" xmlns:p="http://schemas.openxmlformats.org/presentationml/2006/main">
+  <p:cSld>
+    <p:spTree>
+      <p:nvGrpSpPr>
+        <p:cNvPr id="1" name=""/>
+        <p:cNvGrpSpPr/>
+        <p:nvPr/>
+      </p:nvGrpSpPr>
+      <p:grpSpPr>
+        <a:xfrm>
+          <a:off x="0" y="0"/>
+          <a:ext cx="0" cy="0"/>
+          <a:chOff x="0" y="0"/>
+          <a:chExt cx="0" cy="0"/>
+        </a:xfrm>
+      </p:grpSpPr>
+      <p:sp>
+        <p:nvSpPr>
+          <p:cNvPr id="2" name="Title 1"/>
+          <p:cNvSpPr>
+            <a:spLocks noGrp="1"/>
+          </p:cNvSpPr>
+          <p:nvPr>
+            <p:ph type="title"/>
+          </p:nvPr>
+        </p:nvSpPr>
+        <p:spPr>
+          <a:xfrm>
+            <a:off x="0" y="0"/>
+            <a:ext cx="9144000" cy="582780"/>
+          </a:xfrm>
+        </p:spPr>
+        <p:txBody>
+          <a:bodyPr/>
+          <a:lstStyle/>
           <a:p>
             <a:pPr lvl="0" indent="0" marL="0">
               <a:buNone/>
             </a:pPr>
             <a:r>
               <a:rPr/>
-              <a:t>Logistic regression is used when: - The response variable is </a:t>
-            </a:r>
+              <a:t>Step 7: Model Fit Assessment</a:t>
+            </a:r>
+          </a:p>
+        </p:txBody>
+      </p:sp>
+    </p:spTree>
+  </p:cSld>
+</p:sld>
+</file>
+
+<file path=ppt/slides/slide22.xml><?xml version="1.0" encoding="utf-8"?>
+<p:sld xmlns:a="http://schemas.openxmlformats.org/drawingml/2006/main" xmlns:r="http://schemas.openxmlformats.org/officeDocument/2006/relationships" xmlns:p="http://schemas.openxmlformats.org/presentationml/2006/main">
+  <p:cSld>
+    <p:spTree>
+      <p:nvGrpSpPr>
+        <p:cNvPr id="1" name=""/>
+        <p:cNvGrpSpPr/>
+        <p:nvPr/>
+      </p:nvGrpSpPr>
+      <p:grpSpPr>
+        <a:xfrm>
+          <a:off x="0" y="0"/>
+          <a:ext cx="0" cy="0"/>
+          <a:chOff x="0" y="0"/>
+          <a:chExt cx="0" cy="0"/>
+        </a:xfrm>
+      </p:grpSpPr>
+      <p:sp>
+        <p:nvSpPr>
+          <p:cNvPr id="2" name="Title 1"/>
+          <p:cNvSpPr>
+            <a:spLocks noGrp="1"/>
+          </p:cNvSpPr>
+          <p:nvPr>
+            <p:ph type="title"/>
+          </p:nvPr>
+        </p:nvSpPr>
+        <p:spPr>
+          <a:xfrm>
+            <a:off x="0" y="0"/>
+            <a:ext cx="9144000" cy="582780"/>
+          </a:xfrm>
+        </p:spPr>
+        <p:txBody>
+          <a:bodyPr/>
+          <a:lstStyle/>
+          <a:p>
+            <a:pPr lvl="0" indent="0" marL="0">
+              <a:buNone/>
+            </a:pPr>
             <a:r>
               <a:rPr b="1"/>
-              <a:t>binary</a:t>
-            </a:r>
+              <a:t>Calculating Pseudo-R2 Values</a:t>
+            </a:r>
+          </a:p>
+        </p:txBody>
+      </p:sp>
+      <p:sp>
+        <p:nvSpPr>
+          <p:cNvPr id="3" name="Content Placeholder 2"/>
+          <p:cNvSpPr>
+            <a:spLocks noGrp="1"/>
+          </p:cNvSpPr>
+          <p:nvPr>
+            <p:ph idx="1"/>
+          </p:nvPr>
+        </p:nvSpPr>
+        <p:spPr/>
+        <p:txBody>
+          <a:bodyPr/>
+          <a:lstStyle/>
+          <a:p>
+            <a:pPr lvl="0" indent="0" marL="0">
+              <a:buNone/>
+            </a:pPr>
             <a:r>
               <a:rPr/>
-              <a:t> (yes/no, 1/0, present/absent) - Data follows a </a:t>
-            </a:r>
+              <a:t>Unlike linear regression, logistic regression doesn’t have a traditional R². We use pseudo-R² instead:</a:t>
+            </a:r>
+          </a:p>
+          <a:p>
+            <a:pPr lvl="0" indent="0">
+              <a:buNone/>
+            </a:pPr>
+            <a:r>
+              <a:rPr>
+                <a:solidFill>
+                  <a:srgbClr val="5E5E5E"/>
+                </a:solidFill>
+                <a:latin typeface="Courier"/>
+              </a:rPr>
+              <a:t># Calculate pseudo-R2 values using pscl package</a:t>
+            </a:r>
+            <a:br/>
+            <a:r>
+              <a:rPr>
+                <a:solidFill>
+                  <a:srgbClr val="003B4F"/>
+                </a:solidFill>
+                <a:latin typeface="Courier"/>
+              </a:rPr>
+              <a:t>pseudo_r2 &lt;- </a:t>
+            </a:r>
+            <a:r>
+              <a:rPr>
+                <a:solidFill>
+                  <a:srgbClr val="4758AB"/>
+                </a:solidFill>
+                <a:latin typeface="Courier"/>
+              </a:rPr>
+              <a:t>pR2</a:t>
+            </a:r>
+            <a:r>
+              <a:rPr>
+                <a:solidFill>
+                  <a:srgbClr val="003B4F"/>
+                </a:solidFill>
+                <a:latin typeface="Courier"/>
+              </a:rPr>
+              <a:t>(logistic_model)</a:t>
+            </a:r>
+            <a:br/>
+            <a:r>
+              <a:rPr i="1">
+                <a:solidFill>
+                  <a:srgbClr val="5E5E5E"/>
+                </a:solidFill>
+                <a:latin typeface="Courier"/>
+              </a:rPr>
+              <a:t>## fitting null model for pseudo-r2</a:t>
+            </a:r>
+            <a:br/>
+            <a:r>
+              <a:rPr>
+                <a:solidFill>
+                  <a:srgbClr val="003B4F"/>
+                </a:solidFill>
+                <a:latin typeface="Courier"/>
+              </a:rPr>
+              <a:t>pseudo_r2</a:t>
+            </a:r>
+            <a:br/>
+            <a:r>
+              <a:rPr i="1">
+                <a:solidFill>
+                  <a:srgbClr val="5E5E5E"/>
+                </a:solidFill>
+                <a:latin typeface="Courier"/>
+              </a:rPr>
+              <a:t>##         llh     llhNull          G2    McFadden        r2ML        r2CU </a:t>
+            </a:r>
+            <a:br/>
+            <a:r>
+              <a:rPr i="1">
+                <a:solidFill>
+                  <a:srgbClr val="5E5E5E"/>
+                </a:solidFill>
+                <a:latin typeface="Courier"/>
+              </a:rPr>
+              <a:t>## -17.0204762 -30.0881077  26.1352630   0.4343122   0.4478763   0.6009400</a:t>
+            </a:r>
+          </a:p>
+        </p:txBody>
+      </p:sp>
+    </p:spTree>
+  </p:cSld>
+</p:sld>
+</file>
+
+<file path=ppt/slides/slide23.xml><?xml version="1.0" encoding="utf-8"?>
+<p:sld xmlns:a="http://schemas.openxmlformats.org/drawingml/2006/main" xmlns:r="http://schemas.openxmlformats.org/officeDocument/2006/relationships" xmlns:p="http://schemas.openxmlformats.org/presentationml/2006/main">
+  <p:cSld>
+    <p:spTree>
+      <p:nvGrpSpPr>
+        <p:cNvPr id="1" name=""/>
+        <p:cNvGrpSpPr/>
+        <p:nvPr/>
+      </p:nvGrpSpPr>
+      <p:grpSpPr>
+        <a:xfrm>
+          <a:off x="0" y="0"/>
+          <a:ext cx="0" cy="0"/>
+          <a:chOff x="0" y="0"/>
+          <a:chExt cx="0" cy="0"/>
+        </a:xfrm>
+      </p:grpSpPr>
+      <p:sp>
+        <p:nvSpPr>
+          <p:cNvPr id="2" name="Title 1"/>
+          <p:cNvSpPr>
+            <a:spLocks noGrp="1"/>
+          </p:cNvSpPr>
+          <p:nvPr>
+            <p:ph type="title"/>
+          </p:nvPr>
+        </p:nvSpPr>
+        <p:spPr>
+          <a:xfrm>
+            <a:off x="0" y="0"/>
+            <a:ext cx="9144000" cy="582780"/>
+          </a:xfrm>
+        </p:spPr>
+        <p:txBody>
+          <a:bodyPr/>
+          <a:lstStyle/>
+          <a:p>
+            <a:pPr lvl="0" indent="0" marL="0">
+              <a:buNone/>
+            </a:pPr>
+            <a:r>
+              <a:rPr/>
+              <a:t>Interpreting Pseudo-R2 Values</a:t>
+            </a:r>
+          </a:p>
+        </p:txBody>
+      </p:sp>
+      <p:sp>
+        <p:nvSpPr>
+          <p:cNvPr id="3" name="Content Placeholder 2"/>
+          <p:cNvSpPr>
+            <a:spLocks noGrp="1"/>
+          </p:cNvSpPr>
+          <p:nvPr>
+            <p:ph idx="1"/>
+          </p:nvPr>
+        </p:nvSpPr>
+        <p:spPr/>
+        <p:txBody>
+          <a:bodyPr/>
+          <a:lstStyle/>
+          <a:p>
+            <a:pPr lvl="0" indent="0" marL="0">
+              <a:buNone/>
+            </a:pPr>
+            <a:r>
+              <a:rPr/>
+              <a:t>The last three values are the pseudo-R² statistics:</a:t>
+            </a:r>
+          </a:p>
+          <a:p>
+            <a:pPr lvl="0"/>
             <a:r>
               <a:rPr b="1"/>
-              <a:t>binomial distribution</a:t>
+              <a:t>McFadden</a:t>
             </a:r>
             <a:r>
               <a:rPr/>
-              <a:t> (not normal) - We want to model the </a:t>
-            </a:r>
+              <a:t>: Compares model to null model</a:t>
+            </a:r>
+          </a:p>
+          <a:p>
+            <a:pPr lvl="0"/>
             <a:r>
               <a:rPr b="1"/>
-              <a:t>probability</a:t>
+              <a:t>r2ML</a:t>
             </a:r>
             <a:r>
               <a:rPr/>
-              <a:t> of an outcome</a:t>
+              <a:t>: Maximum likelihood based R²</a:t>
+            </a:r>
+          </a:p>
+          <a:p>
+            <a:pPr lvl="0"/>
+            <a:r>
+              <a:rPr b="1"/>
+              <a:t>r2CU</a:t>
+            </a:r>
+            <a:r>
+              <a:rPr/>
+              <a:t>: Cragg-Uhler (Nagelkerke) R²</a:t>
             </a:r>
           </a:p>
           <a:p>
             <a:pPr lvl="0" indent="0" marL="0">
-              <a:spcBef>
-                <a:spcPts val="3000"/>
-              </a:spcBef>
               <a:buNone/>
             </a:pPr>
             <a:r>
+              <a:rPr/>
+              <a:t>Values around 0.4-0.5 indicate moderate to good fit. Our model explains approximately 40-50% of the variation in sexual maturity status.</a:t>
+            </a:r>
+          </a:p>
+        </p:txBody>
+      </p:sp>
+    </p:spTree>
+  </p:cSld>
+</p:sld>
+</file>
+
+<file path=ppt/slides/slide24.xml><?xml version="1.0" encoding="utf-8"?>
+<p:sld xmlns:a="http://schemas.openxmlformats.org/drawingml/2006/main" xmlns:r="http://schemas.openxmlformats.org/officeDocument/2006/relationships" xmlns:p="http://schemas.openxmlformats.org/presentationml/2006/main">
+  <p:cSld>
+    <p:spTree>
+      <p:nvGrpSpPr>
+        <p:cNvPr id="1" name=""/>
+        <p:cNvGrpSpPr/>
+        <p:nvPr/>
+      </p:nvGrpSpPr>
+      <p:grpSpPr>
+        <a:xfrm>
+          <a:off x="0" y="0"/>
+          <a:ext cx="0" cy="0"/>
+          <a:chOff x="0" y="0"/>
+          <a:chExt cx="0" cy="0"/>
+        </a:xfrm>
+      </p:grpSpPr>
+      <p:sp>
+        <p:nvSpPr>
+          <p:cNvPr id="2" name="Title 1"/>
+          <p:cNvSpPr>
+            <a:spLocks noGrp="1"/>
+          </p:cNvSpPr>
+          <p:nvPr>
+            <p:ph type="title"/>
+          </p:nvPr>
+        </p:nvSpPr>
+        <p:spPr>
+          <a:xfrm>
+            <a:off x="0" y="0"/>
+            <a:ext cx="9144000" cy="582780"/>
+          </a:xfrm>
+        </p:spPr>
+        <p:txBody>
+          <a:bodyPr/>
+          <a:lstStyle/>
+          <a:p>
+            <a:pPr lvl="0" indent="0" marL="0">
+              <a:buNone/>
+            </a:pPr>
+            <a:r>
+              <a:rPr/>
+              <a:t>Step 8: Additional Diagnostics</a:t>
+            </a:r>
+          </a:p>
+        </p:txBody>
+      </p:sp>
+    </p:spTree>
+  </p:cSld>
+</p:sld>
+</file>
+
+<file path=ppt/slides/slide25.xml><?xml version="1.0" encoding="utf-8"?>
+<p:sld xmlns:a="http://schemas.openxmlformats.org/drawingml/2006/main" xmlns:r="http://schemas.openxmlformats.org/officeDocument/2006/relationships" xmlns:p="http://schemas.openxmlformats.org/presentationml/2006/main">
+  <p:cSld>
+    <p:spTree>
+      <p:nvGrpSpPr>
+        <p:cNvPr id="1" name=""/>
+        <p:cNvGrpSpPr/>
+        <p:nvPr/>
+      </p:nvGrpSpPr>
+      <p:grpSpPr>
+        <a:xfrm>
+          <a:off x="0" y="0"/>
+          <a:ext cx="0" cy="0"/>
+          <a:chOff x="0" y="0"/>
+          <a:chExt cx="0" cy="0"/>
+        </a:xfrm>
+      </p:grpSpPr>
+      <p:sp>
+        <p:nvSpPr>
+          <p:cNvPr id="2" name="Title 1"/>
+          <p:cNvSpPr>
+            <a:spLocks noGrp="1"/>
+          </p:cNvSpPr>
+          <p:nvPr>
+            <p:ph type="title"/>
+          </p:nvPr>
+        </p:nvSpPr>
+        <p:spPr>
+          <a:xfrm>
+            <a:off x="0" y="0"/>
+            <a:ext cx="9144000" cy="871538"/>
+          </a:xfrm>
+        </p:spPr>
+        <p:txBody>
+          <a:bodyPr/>
+          <a:lstStyle/>
+          <a:p>
+            <a:pPr lvl="0" indent="0" marL="0">
+              <a:buNone/>
+            </a:pPr>
+            <a:r>
               <a:rPr b="1"/>
-              <a:t>Today’s Example: Lizard Sexual Maturity</a:t>
-            </a:r>
-          </a:p>
+              <a:t>Creating a More Detailed Summary Plot</a:t>
+            </a:r>
+          </a:p>
+        </p:txBody>
+      </p:sp>
+      <p:sp>
+        <p:nvSpPr>
+          <p:cNvPr id="4" name="Text Placeholder 3"/>
+          <p:cNvSpPr>
+            <a:spLocks noGrp="1"/>
+          </p:cNvSpPr>
+          <p:nvPr>
+            <p:ph idx="2" sz="half" type="body"/>
+          </p:nvPr>
+        </p:nvSpPr>
+        <p:spPr/>
+        <p:txBody>
+          <a:bodyPr/>
+          <a:lstStyle/>
+          <a:p>
+            <a:pPr lvl="0" indent="0">
+              <a:buNone/>
+            </a:pPr>
+            <a:r>
+              <a:rPr>
+                <a:solidFill>
+                  <a:srgbClr val="5E5E5E"/>
+                </a:solidFill>
+                <a:latin typeface="Courier"/>
+              </a:rPr>
+              <a:t># Create a plot showing observed vs predicted probabilities</a:t>
+            </a:r>
+            <a:br/>
+            <a:r>
+              <a:rPr>
+                <a:solidFill>
+                  <a:srgbClr val="003B4F"/>
+                </a:solidFill>
+                <a:latin typeface="Courier"/>
+              </a:rPr>
+              <a:t>lizards_df</a:t>
+            </a:r>
+            <a:r>
+              <a:rPr>
+                <a:solidFill>
+                  <a:srgbClr val="5E5E5E"/>
+                </a:solidFill>
+                <a:latin typeface="Courier"/>
+              </a:rPr>
+              <a:t>$</a:t>
+            </a:r>
+            <a:r>
+              <a:rPr>
+                <a:solidFill>
+                  <a:srgbClr val="003B4F"/>
+                </a:solidFill>
+                <a:latin typeface="Courier"/>
+              </a:rPr>
+              <a:t>predicted_prob &lt;- </a:t>
+            </a:r>
+            <a:r>
+              <a:rPr>
+                <a:solidFill>
+                  <a:srgbClr val="4758AB"/>
+                </a:solidFill>
+                <a:latin typeface="Courier"/>
+              </a:rPr>
+              <a:t>predict</a:t>
+            </a:r>
+            <a:r>
+              <a:rPr>
+                <a:solidFill>
+                  <a:srgbClr val="003B4F"/>
+                </a:solidFill>
+                <a:latin typeface="Courier"/>
+              </a:rPr>
+              <a:t>(logistic_model, </a:t>
+            </a:r>
+            <a:r>
+              <a:rPr>
+                <a:solidFill>
+                  <a:srgbClr val="657422"/>
+                </a:solidFill>
+                <a:latin typeface="Courier"/>
+              </a:rPr>
+              <a:t>type =</a:t>
+            </a:r>
+            <a:r>
+              <a:rPr>
+                <a:solidFill>
+                  <a:srgbClr val="003B4F"/>
+                </a:solidFill>
+                <a:latin typeface="Courier"/>
+              </a:rPr>
+              <a:t> </a:t>
+            </a:r>
+            <a:r>
+              <a:rPr>
+                <a:solidFill>
+                  <a:srgbClr val="20794D"/>
+                </a:solidFill>
+                <a:latin typeface="Courier"/>
+              </a:rPr>
+              <a:t>"response"</a:t>
+            </a:r>
+            <a:r>
+              <a:rPr>
+                <a:solidFill>
+                  <a:srgbClr val="003B4F"/>
+                </a:solidFill>
+                <a:latin typeface="Courier"/>
+              </a:rPr>
+              <a:t>)</a:t>
+            </a:r>
+            <a:br/>
+            <a:br/>
+            <a:r>
+              <a:rPr>
+                <a:solidFill>
+                  <a:srgbClr val="003B4F"/>
+                </a:solidFill>
+                <a:latin typeface="Courier"/>
+              </a:rPr>
+              <a:t>diagnostic_plot &lt;- </a:t>
+            </a:r>
+            <a:r>
+              <a:rPr>
+                <a:solidFill>
+                  <a:srgbClr val="4758AB"/>
+                </a:solidFill>
+                <a:latin typeface="Courier"/>
+              </a:rPr>
+              <a:t>ggplot</a:t>
+            </a:r>
+            <a:r>
+              <a:rPr>
+                <a:solidFill>
+                  <a:srgbClr val="003B4F"/>
+                </a:solidFill>
+                <a:latin typeface="Courier"/>
+              </a:rPr>
+              <a:t>(lizards_df, </a:t>
+            </a:r>
+            <a:r>
+              <a:rPr>
+                <a:solidFill>
+                  <a:srgbClr val="4758AB"/>
+                </a:solidFill>
+                <a:latin typeface="Courier"/>
+              </a:rPr>
+              <a:t>aes</a:t>
+            </a:r>
+            <a:r>
+              <a:rPr>
+                <a:solidFill>
+                  <a:srgbClr val="003B4F"/>
+                </a:solidFill>
+                <a:latin typeface="Courier"/>
+              </a:rPr>
+              <a:t>(</a:t>
+            </a:r>
+            <a:r>
+              <a:rPr>
+                <a:solidFill>
+                  <a:srgbClr val="657422"/>
+                </a:solidFill>
+                <a:latin typeface="Courier"/>
+              </a:rPr>
+              <a:t>x =</a:t>
+            </a:r>
+            <a:r>
+              <a:rPr>
+                <a:solidFill>
+                  <a:srgbClr val="003B4F"/>
+                </a:solidFill>
+                <a:latin typeface="Courier"/>
+              </a:rPr>
+              <a:t> length)) </a:t>
+            </a:r>
+            <a:r>
+              <a:rPr>
+                <a:solidFill>
+                  <a:srgbClr val="5E5E5E"/>
+                </a:solidFill>
+                <a:latin typeface="Courier"/>
+              </a:rPr>
+              <a:t>+</a:t>
+            </a:r>
+            <a:br/>
+            <a:r>
+              <a:rPr>
+                <a:solidFill>
+                  <a:srgbClr val="003B4F"/>
+                </a:solidFill>
+                <a:latin typeface="Courier"/>
+              </a:rPr>
+              <a:t>  </a:t>
+            </a:r>
+            <a:r>
+              <a:rPr>
+                <a:solidFill>
+                  <a:srgbClr val="5E5E5E"/>
+                </a:solidFill>
+                <a:latin typeface="Courier"/>
+              </a:rPr>
+              <a:t># Add observed data as points</a:t>
+            </a:r>
+            <a:br/>
+            <a:r>
+              <a:rPr>
+                <a:solidFill>
+                  <a:srgbClr val="003B4F"/>
+                </a:solidFill>
+                <a:latin typeface="Courier"/>
+              </a:rPr>
+              <a:t>  </a:t>
+            </a:r>
+            <a:r>
+              <a:rPr>
+                <a:solidFill>
+                  <a:srgbClr val="4758AB"/>
+                </a:solidFill>
+                <a:latin typeface="Courier"/>
+              </a:rPr>
+              <a:t>geom_point</a:t>
+            </a:r>
+            <a:r>
+              <a:rPr>
+                <a:solidFill>
+                  <a:srgbClr val="003B4F"/>
+                </a:solidFill>
+                <a:latin typeface="Courier"/>
+              </a:rPr>
+              <a:t>(</a:t>
+            </a:r>
+            <a:r>
+              <a:rPr>
+                <a:solidFill>
+                  <a:srgbClr val="4758AB"/>
+                </a:solidFill>
+                <a:latin typeface="Courier"/>
+              </a:rPr>
+              <a:t>aes</a:t>
+            </a:r>
+            <a:r>
+              <a:rPr>
+                <a:solidFill>
+                  <a:srgbClr val="003B4F"/>
+                </a:solidFill>
+                <a:latin typeface="Courier"/>
+              </a:rPr>
+              <a:t>(</a:t>
+            </a:r>
+            <a:r>
+              <a:rPr>
+                <a:solidFill>
+                  <a:srgbClr val="657422"/>
+                </a:solidFill>
+                <a:latin typeface="Courier"/>
+              </a:rPr>
+              <a:t>y =</a:t>
+            </a:r>
+            <a:r>
+              <a:rPr>
+                <a:solidFill>
+                  <a:srgbClr val="003B4F"/>
+                </a:solidFill>
+                <a:latin typeface="Courier"/>
+              </a:rPr>
+              <a:t> mature), </a:t>
+            </a:r>
+            <a:r>
+              <a:rPr>
+                <a:solidFill>
+                  <a:srgbClr val="657422"/>
+                </a:solidFill>
+                <a:latin typeface="Courier"/>
+              </a:rPr>
+              <a:t>alpha =</a:t>
+            </a:r>
+            <a:r>
+              <a:rPr>
+                <a:solidFill>
+                  <a:srgbClr val="003B4F"/>
+                </a:solidFill>
+                <a:latin typeface="Courier"/>
+              </a:rPr>
+              <a:t> </a:t>
+            </a:r>
+            <a:r>
+              <a:rPr>
+                <a:solidFill>
+                  <a:srgbClr val="AD0000"/>
+                </a:solidFill>
+                <a:latin typeface="Courier"/>
+              </a:rPr>
+              <a:t>0.5</a:t>
+            </a:r>
+            <a:r>
+              <a:rPr>
+                <a:solidFill>
+                  <a:srgbClr val="003B4F"/>
+                </a:solidFill>
+                <a:latin typeface="Courier"/>
+              </a:rPr>
+              <a:t>, </a:t>
+            </a:r>
+            <a:r>
+              <a:rPr>
+                <a:solidFill>
+                  <a:srgbClr val="657422"/>
+                </a:solidFill>
+                <a:latin typeface="Courier"/>
+              </a:rPr>
+              <a:t>size =</a:t>
+            </a:r>
+            <a:r>
+              <a:rPr>
+                <a:solidFill>
+                  <a:srgbClr val="003B4F"/>
+                </a:solidFill>
+                <a:latin typeface="Courier"/>
+              </a:rPr>
+              <a:t> </a:t>
+            </a:r>
+            <a:r>
+              <a:rPr>
+                <a:solidFill>
+                  <a:srgbClr val="AD0000"/>
+                </a:solidFill>
+                <a:latin typeface="Courier"/>
+              </a:rPr>
+              <a:t>2</a:t>
+            </a:r>
+            <a:r>
+              <a:rPr>
+                <a:solidFill>
+                  <a:srgbClr val="003B4F"/>
+                </a:solidFill>
+                <a:latin typeface="Courier"/>
+              </a:rPr>
+              <a:t>) </a:t>
+            </a:r>
+            <a:r>
+              <a:rPr>
+                <a:solidFill>
+                  <a:srgbClr val="5E5E5E"/>
+                </a:solidFill>
+                <a:latin typeface="Courier"/>
+              </a:rPr>
+              <a:t>+</a:t>
+            </a:r>
+            <a:br/>
+            <a:r>
+              <a:rPr>
+                <a:solidFill>
+                  <a:srgbClr val="003B4F"/>
+                </a:solidFill>
+                <a:latin typeface="Courier"/>
+              </a:rPr>
+              <a:t>  </a:t>
+            </a:r>
+            <a:r>
+              <a:rPr>
+                <a:solidFill>
+                  <a:srgbClr val="5E5E5E"/>
+                </a:solidFill>
+                <a:latin typeface="Courier"/>
+              </a:rPr>
+              <a:t># Add predicted probabilities</a:t>
+            </a:r>
+            <a:br/>
+            <a:r>
+              <a:rPr>
+                <a:solidFill>
+                  <a:srgbClr val="003B4F"/>
+                </a:solidFill>
+                <a:latin typeface="Courier"/>
+              </a:rPr>
+              <a:t>  </a:t>
+            </a:r>
+            <a:r>
+              <a:rPr>
+                <a:solidFill>
+                  <a:srgbClr val="4758AB"/>
+                </a:solidFill>
+                <a:latin typeface="Courier"/>
+              </a:rPr>
+              <a:t>geom_line</a:t>
+            </a:r>
+            <a:r>
+              <a:rPr>
+                <a:solidFill>
+                  <a:srgbClr val="003B4F"/>
+                </a:solidFill>
+                <a:latin typeface="Courier"/>
+              </a:rPr>
+              <a:t>(</a:t>
+            </a:r>
+            <a:r>
+              <a:rPr>
+                <a:solidFill>
+                  <a:srgbClr val="4758AB"/>
+                </a:solidFill>
+                <a:latin typeface="Courier"/>
+              </a:rPr>
+              <a:t>aes</a:t>
+            </a:r>
+            <a:r>
+              <a:rPr>
+                <a:solidFill>
+                  <a:srgbClr val="003B4F"/>
+                </a:solidFill>
+                <a:latin typeface="Courier"/>
+              </a:rPr>
+              <a:t>(</a:t>
+            </a:r>
+            <a:r>
+              <a:rPr>
+                <a:solidFill>
+                  <a:srgbClr val="657422"/>
+                </a:solidFill>
+                <a:latin typeface="Courier"/>
+              </a:rPr>
+              <a:t>y =</a:t>
+            </a:r>
+            <a:r>
+              <a:rPr>
+                <a:solidFill>
+                  <a:srgbClr val="003B4F"/>
+                </a:solidFill>
+                <a:latin typeface="Courier"/>
+              </a:rPr>
+              <a:t> predicted_prob), </a:t>
+            </a:r>
+            <a:r>
+              <a:rPr>
+                <a:solidFill>
+                  <a:srgbClr val="657422"/>
+                </a:solidFill>
+                <a:latin typeface="Courier"/>
+              </a:rPr>
+              <a:t>color =</a:t>
+            </a:r>
+            <a:r>
+              <a:rPr>
+                <a:solidFill>
+                  <a:srgbClr val="003B4F"/>
+                </a:solidFill>
+                <a:latin typeface="Courier"/>
+              </a:rPr>
+              <a:t> </a:t>
+            </a:r>
+            <a:r>
+              <a:rPr>
+                <a:solidFill>
+                  <a:srgbClr val="20794D"/>
+                </a:solidFill>
+                <a:latin typeface="Courier"/>
+              </a:rPr>
+              <a:t>"blue"</a:t>
+            </a:r>
+            <a:r>
+              <a:rPr>
+                <a:solidFill>
+                  <a:srgbClr val="003B4F"/>
+                </a:solidFill>
+                <a:latin typeface="Courier"/>
+              </a:rPr>
+              <a:t>, </a:t>
+            </a:r>
+            <a:r>
+              <a:rPr>
+                <a:solidFill>
+                  <a:srgbClr val="657422"/>
+                </a:solidFill>
+                <a:latin typeface="Courier"/>
+              </a:rPr>
+              <a:t>size =</a:t>
+            </a:r>
+            <a:r>
+              <a:rPr>
+                <a:solidFill>
+                  <a:srgbClr val="003B4F"/>
+                </a:solidFill>
+                <a:latin typeface="Courier"/>
+              </a:rPr>
+              <a:t> </a:t>
+            </a:r>
+            <a:r>
+              <a:rPr>
+                <a:solidFill>
+                  <a:srgbClr val="AD0000"/>
+                </a:solidFill>
+                <a:latin typeface="Courier"/>
+              </a:rPr>
+              <a:t>1</a:t>
+            </a:r>
+            <a:r>
+              <a:rPr>
+                <a:solidFill>
+                  <a:srgbClr val="003B4F"/>
+                </a:solidFill>
+                <a:latin typeface="Courier"/>
+              </a:rPr>
+              <a:t>) </a:t>
+            </a:r>
+            <a:r>
+              <a:rPr>
+                <a:solidFill>
+                  <a:srgbClr val="5E5E5E"/>
+                </a:solidFill>
+                <a:latin typeface="Courier"/>
+              </a:rPr>
+              <a:t>+</a:t>
+            </a:r>
+            <a:br/>
+            <a:r>
+              <a:rPr>
+                <a:solidFill>
+                  <a:srgbClr val="003B4F"/>
+                </a:solidFill>
+                <a:latin typeface="Courier"/>
+              </a:rPr>
+              <a:t>  </a:t>
+            </a:r>
+            <a:r>
+              <a:rPr>
+                <a:solidFill>
+                  <a:srgbClr val="5E5E5E"/>
+                </a:solidFill>
+                <a:latin typeface="Courier"/>
+              </a:rPr>
+              <a:t># Add 50% probability threshold</a:t>
+            </a:r>
+            <a:br/>
+            <a:r>
+              <a:rPr>
+                <a:solidFill>
+                  <a:srgbClr val="003B4F"/>
+                </a:solidFill>
+                <a:latin typeface="Courier"/>
+              </a:rPr>
+              <a:t>  </a:t>
+            </a:r>
+            <a:r>
+              <a:rPr>
+                <a:solidFill>
+                  <a:srgbClr val="4758AB"/>
+                </a:solidFill>
+                <a:latin typeface="Courier"/>
+              </a:rPr>
+              <a:t>geom_hline</a:t>
+            </a:r>
+            <a:r>
+              <a:rPr>
+                <a:solidFill>
+                  <a:srgbClr val="003B4F"/>
+                </a:solidFill>
+                <a:latin typeface="Courier"/>
+              </a:rPr>
+              <a:t>(</a:t>
+            </a:r>
+            <a:r>
+              <a:rPr>
+                <a:solidFill>
+                  <a:srgbClr val="657422"/>
+                </a:solidFill>
+                <a:latin typeface="Courier"/>
+              </a:rPr>
+              <a:t>yintercept =</a:t>
+            </a:r>
+            <a:r>
+              <a:rPr>
+                <a:solidFill>
+                  <a:srgbClr val="003B4F"/>
+                </a:solidFill>
+                <a:latin typeface="Courier"/>
+              </a:rPr>
+              <a:t> </a:t>
+            </a:r>
+            <a:r>
+              <a:rPr>
+                <a:solidFill>
+                  <a:srgbClr val="AD0000"/>
+                </a:solidFill>
+                <a:latin typeface="Courier"/>
+              </a:rPr>
+              <a:t>0.5</a:t>
+            </a:r>
+            <a:r>
+              <a:rPr>
+                <a:solidFill>
+                  <a:srgbClr val="003B4F"/>
+                </a:solidFill>
+                <a:latin typeface="Courier"/>
+              </a:rPr>
+              <a:t>, </a:t>
+            </a:r>
+            <a:r>
+              <a:rPr>
+                <a:solidFill>
+                  <a:srgbClr val="657422"/>
+                </a:solidFill>
+                <a:latin typeface="Courier"/>
+              </a:rPr>
+              <a:t>linetype =</a:t>
+            </a:r>
+            <a:r>
+              <a:rPr>
+                <a:solidFill>
+                  <a:srgbClr val="003B4F"/>
+                </a:solidFill>
+                <a:latin typeface="Courier"/>
+              </a:rPr>
+              <a:t> </a:t>
+            </a:r>
+            <a:r>
+              <a:rPr>
+                <a:solidFill>
+                  <a:srgbClr val="20794D"/>
+                </a:solidFill>
+                <a:latin typeface="Courier"/>
+              </a:rPr>
+              <a:t>"dashed"</a:t>
+            </a:r>
+            <a:r>
+              <a:rPr>
+                <a:solidFill>
+                  <a:srgbClr val="003B4F"/>
+                </a:solidFill>
+                <a:latin typeface="Courier"/>
+              </a:rPr>
+              <a:t>, </a:t>
+            </a:r>
+            <a:r>
+              <a:rPr>
+                <a:solidFill>
+                  <a:srgbClr val="657422"/>
+                </a:solidFill>
+                <a:latin typeface="Courier"/>
+              </a:rPr>
+              <a:t>color =</a:t>
+            </a:r>
+            <a:r>
+              <a:rPr>
+                <a:solidFill>
+                  <a:srgbClr val="003B4F"/>
+                </a:solidFill>
+                <a:latin typeface="Courier"/>
+              </a:rPr>
+              <a:t> </a:t>
+            </a:r>
+            <a:r>
+              <a:rPr>
+                <a:solidFill>
+                  <a:srgbClr val="20794D"/>
+                </a:solidFill>
+                <a:latin typeface="Courier"/>
+              </a:rPr>
+              <a:t>"gray50"</a:t>
+            </a:r>
+            <a:r>
+              <a:rPr>
+                <a:solidFill>
+                  <a:srgbClr val="003B4F"/>
+                </a:solidFill>
+                <a:latin typeface="Courier"/>
+              </a:rPr>
+              <a:t>) </a:t>
+            </a:r>
+            <a:r>
+              <a:rPr>
+                <a:solidFill>
+                  <a:srgbClr val="5E5E5E"/>
+                </a:solidFill>
+                <a:latin typeface="Courier"/>
+              </a:rPr>
+              <a:t>+</a:t>
+            </a:r>
+            <a:br/>
+            <a:r>
+              <a:rPr>
+                <a:solidFill>
+                  <a:srgbClr val="003B4F"/>
+                </a:solidFill>
+                <a:latin typeface="Courier"/>
+              </a:rPr>
+              <a:t>  </a:t>
+            </a:r>
+            <a:r>
+              <a:rPr>
+                <a:solidFill>
+                  <a:srgbClr val="4758AB"/>
+                </a:solidFill>
+                <a:latin typeface="Courier"/>
+              </a:rPr>
+              <a:t>labs</a:t>
+            </a:r>
+            <a:r>
+              <a:rPr>
+                <a:solidFill>
+                  <a:srgbClr val="003B4F"/>
+                </a:solidFill>
+                <a:latin typeface="Courier"/>
+              </a:rPr>
+              <a:t>(</a:t>
+            </a:r>
+            <a:r>
+              <a:rPr>
+                <a:solidFill>
+                  <a:srgbClr val="657422"/>
+                </a:solidFill>
+                <a:latin typeface="Courier"/>
+              </a:rPr>
+              <a:t>title =</a:t>
+            </a:r>
+            <a:r>
+              <a:rPr>
+                <a:solidFill>
+                  <a:srgbClr val="003B4F"/>
+                </a:solidFill>
+                <a:latin typeface="Courier"/>
+              </a:rPr>
+              <a:t> </a:t>
+            </a:r>
+            <a:r>
+              <a:rPr>
+                <a:solidFill>
+                  <a:srgbClr val="20794D"/>
+                </a:solidFill>
+                <a:latin typeface="Courier"/>
+              </a:rPr>
+              <a:t>"Observed Data and Model Predictions"</a:t>
+            </a:r>
+            <a:r>
+              <a:rPr>
+                <a:solidFill>
+                  <a:srgbClr val="003B4F"/>
+                </a:solidFill>
+                <a:latin typeface="Courier"/>
+              </a:rPr>
+              <a:t>,</a:t>
+            </a:r>
+            <a:br/>
+            <a:r>
+              <a:rPr>
+                <a:solidFill>
+                  <a:srgbClr val="003B4F"/>
+                </a:solidFill>
+                <a:latin typeface="Courier"/>
+              </a:rPr>
+              <a:t>       </a:t>
+            </a:r>
+            <a:r>
+              <a:rPr>
+                <a:solidFill>
+                  <a:srgbClr val="657422"/>
+                </a:solidFill>
+                <a:latin typeface="Courier"/>
+              </a:rPr>
+              <a:t>x =</a:t>
+            </a:r>
+            <a:r>
+              <a:rPr>
+                <a:solidFill>
+                  <a:srgbClr val="003B4F"/>
+                </a:solidFill>
+                <a:latin typeface="Courier"/>
+              </a:rPr>
+              <a:t> </a:t>
+            </a:r>
+            <a:r>
+              <a:rPr>
+                <a:solidFill>
+                  <a:srgbClr val="20794D"/>
+                </a:solidFill>
+                <a:latin typeface="Courier"/>
+              </a:rPr>
+              <a:t>"Body Length (cm)"</a:t>
+            </a:r>
+            <a:r>
+              <a:rPr>
+                <a:solidFill>
+                  <a:srgbClr val="003B4F"/>
+                </a:solidFill>
+                <a:latin typeface="Courier"/>
+              </a:rPr>
+              <a:t>,</a:t>
+            </a:r>
+            <a:br/>
+            <a:r>
+              <a:rPr>
+                <a:solidFill>
+                  <a:srgbClr val="003B4F"/>
+                </a:solidFill>
+                <a:latin typeface="Courier"/>
+              </a:rPr>
+              <a:t>       </a:t>
+            </a:r>
+            <a:r>
+              <a:rPr>
+                <a:solidFill>
+                  <a:srgbClr val="657422"/>
+                </a:solidFill>
+                <a:latin typeface="Courier"/>
+              </a:rPr>
+              <a:t>y =</a:t>
+            </a:r>
+            <a:r>
+              <a:rPr>
+                <a:solidFill>
+                  <a:srgbClr val="003B4F"/>
+                </a:solidFill>
+                <a:latin typeface="Courier"/>
+              </a:rPr>
+              <a:t> </a:t>
+            </a:r>
+            <a:r>
+              <a:rPr>
+                <a:solidFill>
+                  <a:srgbClr val="20794D"/>
+                </a:solidFill>
+                <a:latin typeface="Courier"/>
+              </a:rPr>
+              <a:t>"Probability of Sexual Maturity"</a:t>
+            </a:r>
+            <a:r>
+              <a:rPr>
+                <a:solidFill>
+                  <a:srgbClr val="003B4F"/>
+                </a:solidFill>
+                <a:latin typeface="Courier"/>
+              </a:rPr>
+              <a:t>,</a:t>
+            </a:r>
+            <a:br/>
+            <a:r>
+              <a:rPr>
+                <a:solidFill>
+                  <a:srgbClr val="003B4F"/>
+                </a:solidFill>
+                <a:latin typeface="Courier"/>
+              </a:rPr>
+              <a:t>       </a:t>
+            </a:r>
+            <a:r>
+              <a:rPr>
+                <a:solidFill>
+                  <a:srgbClr val="657422"/>
+                </a:solidFill>
+                <a:latin typeface="Courier"/>
+              </a:rPr>
+              <a:t>subtitle =</a:t>
+            </a:r>
+            <a:r>
+              <a:rPr>
+                <a:solidFill>
+                  <a:srgbClr val="003B4F"/>
+                </a:solidFill>
+                <a:latin typeface="Courier"/>
+              </a:rPr>
+              <a:t> </a:t>
+            </a:r>
+            <a:r>
+              <a:rPr>
+                <a:solidFill>
+                  <a:srgbClr val="20794D"/>
+                </a:solidFill>
+                <a:latin typeface="Courier"/>
+              </a:rPr>
+              <a:t>"Points = observed data, Blue line = model predictions"</a:t>
+            </a:r>
+            <a:r>
+              <a:rPr>
+                <a:solidFill>
+                  <a:srgbClr val="003B4F"/>
+                </a:solidFill>
+                <a:latin typeface="Courier"/>
+              </a:rPr>
+              <a:t>) </a:t>
+            </a:r>
+            <a:r>
+              <a:rPr>
+                <a:solidFill>
+                  <a:srgbClr val="5E5E5E"/>
+                </a:solidFill>
+                <a:latin typeface="Courier"/>
+              </a:rPr>
+              <a:t>+</a:t>
+            </a:r>
+            <a:br/>
+            <a:r>
+              <a:rPr>
+                <a:solidFill>
+                  <a:srgbClr val="003B4F"/>
+                </a:solidFill>
+                <a:latin typeface="Courier"/>
+              </a:rPr>
+              <a:t>  </a:t>
+            </a:r>
+            <a:r>
+              <a:rPr>
+                <a:solidFill>
+                  <a:srgbClr val="4758AB"/>
+                </a:solidFill>
+                <a:latin typeface="Courier"/>
+              </a:rPr>
+              <a:t>theme_minimal</a:t>
+            </a:r>
+            <a:r>
+              <a:rPr>
+                <a:solidFill>
+                  <a:srgbClr val="003B4F"/>
+                </a:solidFill>
+                <a:latin typeface="Courier"/>
+              </a:rPr>
+              <a:t>()</a:t>
+            </a:r>
+            <a:br/>
+            <a:br/>
+            <a:r>
+              <a:rPr>
+                <a:solidFill>
+                  <a:srgbClr val="003B4F"/>
+                </a:solidFill>
+                <a:latin typeface="Courier"/>
+              </a:rPr>
+              <a:t>diagnostic_plot</a:t>
+            </a:r>
+          </a:p>
+        </p:txBody>
+      </p:sp>
+      <p:pic>
+        <p:nvPicPr>
+          <p:cNvPr descr="review_lecture_files/figure-pptx/diagnostic_plot-1.png" id="0" name="Picture 1"/>
+          <p:cNvPicPr>
+            <a:picLocks noGrp="1" noChangeAspect="1"/>
+          </p:cNvPicPr>
+          <p:nvPr/>
+        </p:nvPicPr>
+        <p:blipFill>
+          <a:blip r:embed="rId2"/>
+          <a:stretch>
+            <a:fillRect/>
+          </a:stretch>
+        </p:blipFill>
+        <p:spPr bwMode="auto">
+          <a:xfrm>
+            <a:off x="4368800" y="952500"/>
+            <a:ext cx="3797300" cy="3797300"/>
+          </a:xfrm>
+          <a:prstGeom prst="rect">
+            <a:avLst/>
+          </a:prstGeom>
+          <a:noFill/>
+          <a:ln w="9525">
+            <a:noFill/>
+            <a:headEnd/>
+            <a:tailEnd/>
+          </a:ln>
+        </p:spPr>
+      </p:pic>
+    </p:spTree>
+  </p:cSld>
+</p:sld>
+</file>
+
+<file path=ppt/slides/slide26.xml><?xml version="1.0" encoding="utf-8"?>
+<p:sld xmlns:a="http://schemas.openxmlformats.org/drawingml/2006/main" xmlns:r="http://schemas.openxmlformats.org/officeDocument/2006/relationships" xmlns:p="http://schemas.openxmlformats.org/presentationml/2006/main">
+  <p:cSld>
+    <p:spTree>
+      <p:nvGrpSpPr>
+        <p:cNvPr id="1" name=""/>
+        <p:cNvGrpSpPr/>
+        <p:nvPr/>
+      </p:nvGrpSpPr>
+      <p:grpSpPr>
+        <a:xfrm>
+          <a:off x="0" y="0"/>
+          <a:ext cx="0" cy="0"/>
+          <a:chOff x="0" y="0"/>
+          <a:chExt cx="0" cy="0"/>
+        </a:xfrm>
+      </p:grpSpPr>
+      <p:sp>
+        <p:nvSpPr>
+          <p:cNvPr id="2" name="Title 1"/>
+          <p:cNvSpPr>
+            <a:spLocks noGrp="1"/>
+          </p:cNvSpPr>
+          <p:nvPr>
+            <p:ph type="title"/>
+          </p:nvPr>
+        </p:nvSpPr>
+        <p:spPr>
+          <a:xfrm>
+            <a:off x="0" y="0"/>
+            <a:ext cx="9144000" cy="582780"/>
+          </a:xfrm>
+        </p:spPr>
+        <p:txBody>
+          <a:bodyPr/>
+          <a:lstStyle/>
           <a:p>
             <a:pPr lvl="0" indent="0" marL="0">
               <a:buNone/>
             </a:pPr>
             <a:r>
               <a:rPr/>
-              <a:t>We’ll explore the relationship between body length and sexual maturity in female lizards - </a:t>
-            </a:r>
+              <a:t>Summary: Key Takeaways</a:t>
+            </a:r>
+          </a:p>
+        </p:txBody>
+      </p:sp>
+    </p:spTree>
+  </p:cSld>
+</p:sld>
+</file>
+
+<file path=ppt/slides/slide27.xml><?xml version="1.0" encoding="utf-8"?>
+<p:sld xmlns:a="http://schemas.openxmlformats.org/drawingml/2006/main" xmlns:r="http://schemas.openxmlformats.org/officeDocument/2006/relationships" xmlns:p="http://schemas.openxmlformats.org/presentationml/2006/main">
+  <p:cSld>
+    <p:spTree>
+      <p:nvGrpSpPr>
+        <p:cNvPr id="1" name=""/>
+        <p:cNvGrpSpPr/>
+        <p:nvPr/>
+      </p:nvGrpSpPr>
+      <p:grpSpPr>
+        <a:xfrm>
+          <a:off x="0" y="0"/>
+          <a:ext cx="0" cy="0"/>
+          <a:chOff x="0" y="0"/>
+          <a:chExt cx="0" cy="0"/>
+        </a:xfrm>
+      </p:grpSpPr>
+      <p:sp>
+        <p:nvSpPr>
+          <p:cNvPr id="2" name="Title 1"/>
+          <p:cNvSpPr>
+            <a:spLocks noGrp="1"/>
+          </p:cNvSpPr>
+          <p:nvPr>
+            <p:ph type="title"/>
+          </p:nvPr>
+        </p:nvSpPr>
+        <p:spPr>
+          <a:xfrm>
+            <a:off x="0" y="0"/>
+            <a:ext cx="9144000" cy="582780"/>
+          </a:xfrm>
+        </p:spPr>
+        <p:txBody>
+          <a:bodyPr/>
+          <a:lstStyle/>
+          <a:p>
+            <a:pPr lvl="0" indent="0" marL="0">
+              <a:buNone/>
+            </a:pPr>
             <a:r>
               <a:rPr b="1"/>
-              <a:t>Response variable</a:t>
+              <a:t>What We Learned:</a:t>
+            </a:r>
+          </a:p>
+        </p:txBody>
+      </p:sp>
+      <p:sp>
+        <p:nvSpPr>
+          <p:cNvPr id="3" name="Content Placeholder 2"/>
+          <p:cNvSpPr>
+            <a:spLocks noGrp="1"/>
+          </p:cNvSpPr>
+          <p:nvPr>
+            <p:ph idx="1"/>
+          </p:nvPr>
+        </p:nvSpPr>
+        <p:spPr/>
+        <p:txBody>
+          <a:bodyPr/>
+          <a:lstStyle/>
+          <a:p>
+            <a:pPr lvl="0" indent="-342900" marL="342900">
+              <a:buAutoNum type="arabicPeriod"/>
+            </a:pPr>
+            <a:r>
+              <a:rPr b="1"/>
+              <a:t>Logistic regression</a:t>
             </a:r>
             <a:r>
               <a:rPr/>
-              <a:t>: Sexual maturity (mature: 1 = yes, 0 = no) - </a:t>
+              <a:t> models probability of binary outcomes</a:t>
+            </a:r>
+          </a:p>
+          <a:p>
+            <a:pPr lvl="0" indent="-342900" marL="342900">
+              <a:buAutoNum type="arabicPeriod"/>
+            </a:pPr>
+            <a:r>
+              <a:rPr/>
+              <a:t>Uses </a:t>
             </a:r>
             <a:r>
               <a:rPr b="1"/>
-              <a:t>Predictor variable</a:t>
+              <a:t>glm()</a:t>
             </a:r>
             <a:r>
               <a:rPr/>
-              <a:t>: Body length in cm - </a:t>
+              <a:t> with </a:t>
+            </a:r>
+            <a:r>
+              <a:rPr>
+                <a:latin typeface="Courier"/>
+              </a:rPr>
+              <a:t>family = binomial</a:t>
+            </a:r>
+          </a:p>
+          <a:p>
+            <a:pPr lvl="0" indent="-342900" marL="342900">
+              <a:buAutoNum type="arabicPeriod"/>
+            </a:pPr>
+            <a:r>
+              <a:rPr/>
+              <a:t>Coefficients represent changes in </a:t>
             </a:r>
             <a:r>
               <a:rPr b="1"/>
-              <a:t>Question</a:t>
-            </a:r>
+              <a:t>log-odds</a:t>
+            </a:r>
+          </a:p>
+          <a:p>
+            <a:pPr lvl="0" indent="-342900" marL="342900">
+              <a:buAutoNum type="arabicPeriod"/>
+            </a:pPr>
             <a:r>
               <a:rPr/>
-              <a:t>: Can we predict the probability of sexual maturity from body size?</a:t>
-            </a:r>
-          </a:p>
+              <a:t>Convert to </a:t>
+            </a:r>
+            <a:r>
+              <a:rPr b="1"/>
+              <a:t>odds ratios</a:t>
+            </a:r>
+            <a:r>
+              <a:rPr/>
+              <a:t> for interpretation: exp(coefficient)</a:t>
+            </a:r>
+          </a:p>
+          <a:p>
+            <a:pPr lvl="0" indent="-342900" marL="342900">
+              <a:buAutoNum type="arabicPeriod"/>
+            </a:pPr>
+            <a:r>
+              <a:rPr/>
+              <a:t>Creates </a:t>
+            </a:r>
+            <a:r>
+              <a:rPr b="1"/>
+              <a:t>S-shaped probability curves</a:t>
+            </a:r>
+          </a:p>
+          <a:p>
+            <a:pPr lvl="0" indent="-342900" marL="342900">
+              <a:buAutoNum type="arabicPeriod"/>
+            </a:pPr>
+            <a:r>
+              <a:rPr/>
+              <a:t>Use </a:t>
+            </a:r>
+            <a:r>
+              <a:rPr b="1"/>
+              <a:t>pseudo-R²</a:t>
+            </a:r>
+            <a:r>
+              <a:rPr/>
+              <a:t> to assess model fit</a:t>
+            </a:r>
+          </a:p>
+        </p:txBody>
+      </p:sp>
+    </p:spTree>
+  </p:cSld>
+</p:sld>
+</file>
+
+<file path=ppt/slides/slide28.xml><?xml version="1.0" encoding="utf-8"?>
+<p:sld xmlns:a="http://schemas.openxmlformats.org/drawingml/2006/main" xmlns:r="http://schemas.openxmlformats.org/officeDocument/2006/relationships" xmlns:p="http://schemas.openxmlformats.org/presentationml/2006/main">
+  <p:cSld>
+    <p:spTree>
+      <p:nvGrpSpPr>
+        <p:cNvPr id="1" name=""/>
+        <p:cNvGrpSpPr/>
+        <p:nvPr/>
+      </p:nvGrpSpPr>
+      <p:grpSpPr>
+        <a:xfrm>
+          <a:off x="0" y="0"/>
+          <a:ext cx="0" cy="0"/>
+          <a:chOff x="0" y="0"/>
+          <a:chExt cx="0" cy="0"/>
+        </a:xfrm>
+      </p:grpSpPr>
+      <p:sp>
+        <p:nvSpPr>
+          <p:cNvPr id="2" name="Title 1"/>
+          <p:cNvSpPr>
+            <a:spLocks noGrp="1"/>
+          </p:cNvSpPr>
+          <p:nvPr>
+            <p:ph type="title"/>
+          </p:nvPr>
+        </p:nvSpPr>
+        <p:spPr>
+          <a:xfrm>
+            <a:off x="0" y="0"/>
+            <a:ext cx="9144000" cy="582780"/>
+          </a:xfrm>
+        </p:spPr>
+        <p:txBody>
+          <a:bodyPr/>
+          <a:lstStyle/>
           <a:p>
             <a:pPr lvl="0" indent="0" marL="0">
-              <a:spcBef>
-                <a:spcPts val="3000"/>
-              </a:spcBef>
               <a:buNone/>
             </a:pPr>
             <a:r>
               <a:rPr b="1"/>
-              <a:t>Key Difference from Linear Regression</a:t>
-            </a:r>
-          </a:p>
+              <a:t>Our Results:</a:t>
+            </a:r>
+          </a:p>
+        </p:txBody>
+      </p:sp>
+      <p:sp>
+        <p:nvSpPr>
+          <p:cNvPr id="3" name="Content Placeholder 2"/>
+          <p:cNvSpPr>
+            <a:spLocks noGrp="1"/>
+          </p:cNvSpPr>
+          <p:nvPr>
+            <p:ph idx="1"/>
+          </p:nvPr>
+        </p:nvSpPr>
+        <p:spPr/>
+        <p:txBody>
+          <a:bodyPr/>
+          <a:lstStyle/>
           <a:p>
             <a:pPr lvl="0"/>
             <a:r>
               <a:rPr/>
-              <a:t>Linear regression: Models the actual values of Y</a:t>
+              <a:t>Significant positive relationship between body length and sexual maturity</a:t>
             </a:r>
           </a:p>
           <a:p>
             <a:pPr lvl="0"/>
             <a:r>
               <a:rPr/>
-              <a:t>Logistic regression: Models the probability of Y = 1</a:t>
+              <a:t>Each 1 cm increase in length increases odds of maturity by ~28%</a:t>
             </a:r>
           </a:p>
           <a:p>
             <a:pPr lvl="0"/>
             <a:r>
               <a:rPr/>
-              <a:t>Uses Generalized Linear Models (GLM) instead of General Linear Models</a:t>
+              <a:t>Model explains ~40-50% of variation in maturity status</a:t>
+            </a:r>
+          </a:p>
+          <a:p>
+            <a:pPr lvl="0"/>
+            <a:r>
+              <a:rPr/>
+              <a:t>Can predict probability of maturity for any given length</a:t>
+            </a:r>
+          </a:p>
+        </p:txBody>
+      </p:sp>
+    </p:spTree>
+  </p:cSld>
+</p:sld>
+</file>
+
+<file path=ppt/slides/slide29.xml><?xml version="1.0" encoding="utf-8"?>
+<p:sld xmlns:a="http://schemas.openxmlformats.org/drawingml/2006/main" xmlns:r="http://schemas.openxmlformats.org/officeDocument/2006/relationships" xmlns:p="http://schemas.openxmlformats.org/presentationml/2006/main">
+  <p:cSld>
+    <p:spTree>
+      <p:nvGrpSpPr>
+        <p:cNvPr id="1" name=""/>
+        <p:cNvGrpSpPr/>
+        <p:nvPr/>
+      </p:nvGrpSpPr>
+      <p:grpSpPr>
+        <a:xfrm>
+          <a:off x="0" y="0"/>
+          <a:ext cx="0" cy="0"/>
+          <a:chOff x="0" y="0"/>
+          <a:chExt cx="0" cy="0"/>
+        </a:xfrm>
+      </p:grpSpPr>
+      <p:sp>
+        <p:nvSpPr>
+          <p:cNvPr id="2" name="Title 1"/>
+          <p:cNvSpPr>
+            <a:spLocks noGrp="1"/>
+          </p:cNvSpPr>
+          <p:nvPr>
+            <p:ph type="title"/>
+          </p:nvPr>
+        </p:nvSpPr>
+        <p:spPr>
+          <a:xfrm>
+            <a:off x="0" y="0"/>
+            <a:ext cx="9144000" cy="582780"/>
+          </a:xfrm>
+        </p:spPr>
+        <p:txBody>
+          <a:bodyPr/>
+          <a:lstStyle/>
+          <a:p>
+            <a:pPr lvl="0" indent="0" marL="0">
+              <a:buNone/>
+            </a:pPr>
+            <a:r>
+              <a:rPr b="1"/>
+              <a:t>When to Use Logistic Regression:</a:t>
+            </a:r>
+          </a:p>
+        </p:txBody>
+      </p:sp>
+      <p:sp>
+        <p:nvSpPr>
+          <p:cNvPr id="3" name="Content Placeholder 2"/>
+          <p:cNvSpPr>
+            <a:spLocks noGrp="1"/>
+          </p:cNvSpPr>
+          <p:nvPr>
+            <p:ph idx="1"/>
+          </p:nvPr>
+        </p:nvSpPr>
+        <p:spPr/>
+        <p:txBody>
+          <a:bodyPr/>
+          <a:lstStyle/>
+          <a:p>
+            <a:pPr lvl="0"/>
+            <a:r>
+              <a:rPr/>
+              <a:t>Binary response variable (0/1, yes/no, success/failure)</a:t>
+            </a:r>
+          </a:p>
+          <a:p>
+            <a:pPr lvl="0"/>
+            <a:r>
+              <a:rPr/>
+              <a:t>Want to predict probabilities</a:t>
+            </a:r>
+          </a:p>
+          <a:p>
+            <a:pPr lvl="0"/>
+            <a:r>
+              <a:rPr/>
+              <a:t>Relationships that follow S-shaped curves</a:t>
+            </a:r>
+          </a:p>
+          <a:p>
+            <a:pPr lvl="0"/>
+            <a:r>
+              <a:rPr/>
+              <a:t>When assumptions of linear regression are violated</a:t>
             </a:r>
           </a:p>
         </p:txBody>
@@ -4282,8 +8255,8 @@
               <a:buNone/>
             </a:pPr>
             <a:r>
-              <a:rPr/>
-              <a:t>Step 1: Load and Explore the Data</a:t>
+              <a:rPr b="1"/>
+              <a:t>What is Logistic Regression?</a:t>
             </a:r>
           </a:p>
         </p:txBody>
@@ -4303,20 +8276,36 @@
           <a:bodyPr/>
           <a:lstStyle/>
           <a:p>
-            <a:pPr lvl="0" indent="0">
+            <a:pPr lvl="0" indent="0" marL="0">
               <a:buNone/>
             </a:pPr>
             <a:r>
-              <a:rPr>
-                <a:latin typeface="Courier"/>
-              </a:rPr>
-              <a:t>  length mature
-1   10.2      0
-2   10.4      0
-3   11.8      0
-4   12.3      0
-5   13.8      0
-6   16.9      0</a:t>
+              <a:rPr/>
+              <a:t>Logistic regression is used when: - The response variable is </a:t>
+            </a:r>
+            <a:r>
+              <a:rPr b="1"/>
+              <a:t>binary</a:t>
+            </a:r>
+            <a:r>
+              <a:rPr/>
+              <a:t> (yes/no, 1/0, present/absent) - Data follows a </a:t>
+            </a:r>
+            <a:r>
+              <a:rPr b="1"/>
+              <a:t>binomial distribution</a:t>
+            </a:r>
+            <a:r>
+              <a:rPr/>
+              <a:t> (not normal) - We want to model the </a:t>
+            </a:r>
+            <a:r>
+              <a:rPr b="1"/>
+              <a:t>probability</a:t>
+            </a:r>
+            <a:r>
+              <a:rPr/>
+              <a:t> of an outcome</a:t>
             </a:r>
           </a:p>
         </p:txBody>
@@ -4356,7 +8345,7 @@
         <p:spPr>
           <a:xfrm>
             <a:off x="0" y="0"/>
-            <a:ext cx="9144000" cy="871538"/>
+            <a:ext cx="9144000" cy="582780"/>
           </a:xfrm>
         </p:spPr>
         <p:txBody>
@@ -4367,20 +8356,20 @@
               <a:buNone/>
             </a:pPr>
             <a:r>
-              <a:rPr/>
-              <a:t>Step 2: Initial Data Visualization</a:t>
-            </a:r>
-          </a:p>
-        </p:txBody>
-      </p:sp>
-      <p:sp>
-        <p:nvSpPr>
-          <p:cNvPr id="4" name="Text Placeholder 3"/>
-          <p:cNvSpPr>
-            <a:spLocks noGrp="1"/>
-          </p:cNvSpPr>
-          <p:nvPr>
-            <p:ph idx="2" sz="half" type="body"/>
+              <a:rPr b="1"/>
+              <a:t>Today’s Example: Lizard Sexual Maturity</a:t>
+            </a:r>
+          </a:p>
+        </p:txBody>
+      </p:sp>
+      <p:sp>
+        <p:nvSpPr>
+          <p:cNvPr id="3" name="Content Placeholder 2"/>
+          <p:cNvSpPr>
+            <a:spLocks noGrp="1"/>
+          </p:cNvSpPr>
+          <p:nvPr>
+            <p:ph idx="1"/>
           </p:nvPr>
         </p:nvSpPr>
         <p:spPr/>
@@ -4389,57 +8378,39 @@
           <a:lstStyle/>
           <a:p>
             <a:pPr lvl="0" indent="0" marL="0">
-              <a:spcBef>
-                <a:spcPts val="3000"/>
-              </a:spcBef>
               <a:buNone/>
             </a:pPr>
             <a:r>
+              <a:rPr/>
+              <a:t>We’ll explore the relationship between body length and sexual maturity in female lizards - </a:t>
+            </a:r>
+            <a:r>
               <a:rPr b="1"/>
-              <a:t>Creating a Boxplot</a:t>
-            </a:r>
-          </a:p>
-          <a:p>
-            <a:pPr lvl="0" indent="0" marL="0">
-              <a:buNone/>
-            </a:pPr>
+              <a:t>Response variable</a:t>
+            </a:r>
             <a:r>
               <a:rPr/>
-              <a:t>Let’s visualize how body length differs between sexually mature and immature lizards:</a:t>
-            </a:r>
-          </a:p>
-        </p:txBody>
-      </p:sp>
-      <p:pic>
-        <p:nvPicPr>
-          <p:cNvPr descr="review_lecture_files/figure-pptx/initial_boxplot-1.png" id="0" name="Picture 1"/>
-          <p:cNvPicPr>
-            <a:picLocks noGrp="1" noChangeAspect="1"/>
-          </p:cNvPicPr>
-          <p:nvPr/>
-        </p:nvPicPr>
-        <p:blipFill>
-          <a:blip r:embed="rId2"/>
-          <a:stretch>
-            <a:fillRect/>
-          </a:stretch>
-        </p:blipFill>
-        <p:spPr bwMode="auto">
-          <a:xfrm>
-            <a:off x="3657600" y="1244600"/>
-            <a:ext cx="5232400" cy="3225800"/>
-          </a:xfrm>
-          <a:prstGeom prst="rect">
-            <a:avLst/>
-          </a:prstGeom>
-          <a:noFill/>
-          <a:ln w="9525">
-            <a:noFill/>
-            <a:headEnd/>
-            <a:tailEnd/>
-          </a:ln>
-        </p:spPr>
-      </p:pic>
+              <a:t>: Sexual maturity (mature: 1 = yes, 0 = no) - </a:t>
+            </a:r>
+            <a:r>
+              <a:rPr b="1"/>
+              <a:t>Predictor variable</a:t>
+            </a:r>
+            <a:r>
+              <a:rPr/>
+              <a:t>: Body length in cm - </a:t>
+            </a:r>
+            <a:r>
+              <a:rPr b="1"/>
+              <a:t>Question</a:t>
+            </a:r>
+            <a:r>
+              <a:rPr/>
+              <a:t>: Can we predict the probability of sexual maturity from body size?</a:t>
+            </a:r>
+          </a:p>
+        </p:txBody>
+      </p:sp>
     </p:spTree>
   </p:cSld>
 </p:sld>
@@ -4464,56 +8435,67 @@
       </p:grpSpPr>
       <p:sp>
         <p:nvSpPr>
-          <p:cNvPr id="3" name="Content Placeholder 2"/>
-          <p:cNvSpPr>
-            <a:spLocks noGrp="1"/>
-          </p:cNvSpPr>
-          <p:nvPr>
-            <p:ph idx="1"/>
-          </p:nvPr>
-        </p:nvSpPr>
-        <p:spPr/>
+          <p:cNvPr id="2" name="Title 1"/>
+          <p:cNvSpPr>
+            <a:spLocks noGrp="1"/>
+          </p:cNvSpPr>
+          <p:nvPr>
+            <p:ph type="title"/>
+          </p:nvPr>
+        </p:nvSpPr>
+        <p:spPr>
+          <a:xfrm>
+            <a:off x="0" y="0"/>
+            <a:ext cx="9144000" cy="582780"/>
+          </a:xfrm>
+        </p:spPr>
         <p:txBody>
           <a:bodyPr/>
           <a:lstStyle/>
           <a:p>
             <a:pPr lvl="0" indent="0" marL="0">
-              <a:spcBef>
-                <a:spcPts val="3000"/>
-              </a:spcBef>
               <a:buNone/>
             </a:pPr>
             <a:r>
               <a:rPr b="1"/>
-              <a:t>What do we see?</a:t>
-            </a:r>
-          </a:p>
+              <a:t>Key Difference from Linear Regression</a:t>
+            </a:r>
+          </a:p>
+        </p:txBody>
+      </p:sp>
+      <p:sp>
+        <p:nvSpPr>
+          <p:cNvPr id="3" name="Content Placeholder 2"/>
+          <p:cNvSpPr>
+            <a:spLocks noGrp="1"/>
+          </p:cNvSpPr>
+          <p:nvPr>
+            <p:ph idx="1"/>
+          </p:nvPr>
+        </p:nvSpPr>
+        <p:spPr/>
+        <p:txBody>
+          <a:bodyPr/>
+          <a:lstStyle/>
           <a:p>
             <a:pPr lvl="0"/>
             <a:r>
               <a:rPr/>
-              <a:t>There appears to be a relationship between size and sexual maturity</a:t>
+              <a:t>Linear regression: Models the actual values of Y</a:t>
             </a:r>
           </a:p>
           <a:p>
             <a:pPr lvl="0"/>
             <a:r>
               <a:rPr/>
-              <a:t>Mature lizards tend to be longer than immature ones</a:t>
+              <a:t>Logistic regression: Models the probability of Y = 1</a:t>
             </a:r>
           </a:p>
           <a:p>
             <a:pPr lvl="0"/>
             <a:r>
               <a:rPr/>
-              <a:t>But there’s overlap - not a perfect separation</a:t>
-            </a:r>
-          </a:p>
-          <a:p>
-            <a:pPr lvl="0"/>
-            <a:r>
-              <a:rPr/>
-              <a:t>This suggests logistic regression might be appropriate</a:t>
+              <a:t>Uses Generalized Linear Models (GLM) instead of General Linear Models</a:t>
             </a:r>
           </a:p>
         </p:txBody>
@@ -4565,7 +8547,7 @@
             </a:pPr>
             <a:r>
               <a:rPr/>
-              <a:t>Step 3: Fit the Logistic Regression Model</a:t>
+              <a:t>Step 1: Load and Explore the Data</a:t>
             </a:r>
           </a:p>
         </p:txBody>
@@ -4585,168 +8567,209 @@
           <a:bodyPr/>
           <a:lstStyle/>
           <a:p>
-            <a:pPr lvl="0" indent="0" marL="0">
-              <a:spcBef>
-                <a:spcPts val="3000"/>
-              </a:spcBef>
+            <a:pPr lvl="0" indent="0">
               <a:buNone/>
             </a:pPr>
             <a:r>
-              <a:rPr b="1"/>
-              <a:t>Using glm() for Logistic Regression</a:t>
-            </a:r>
-          </a:p>
-          <a:p>
-            <a:pPr lvl="0" indent="0" marL="0">
-              <a:buNone/>
-            </a:pPr>
-            <a:r>
-              <a:rPr/>
-              <a:t>The </a:t>
-            </a:r>
-            <a:r>
-              <a:rPr>
-                <a:latin typeface="Courier"/>
-              </a:rPr>
-              <a:t>glm()</a:t>
-            </a:r>
-            <a:r>
-              <a:rPr/>
-              <a:t> function is similar to </a:t>
-            </a:r>
-            <a:r>
-              <a:rPr>
-                <a:latin typeface="Courier"/>
-              </a:rPr>
-              <a:t>lm()</a:t>
-            </a:r>
-            <a:r>
-              <a:rPr/>
-              <a:t> but requires specifying the distribution family:</a:t>
-            </a:r>
-          </a:p>
-          <a:p>
-            <a:pPr lvl="0" indent="0">
-              <a:buNone/>
-            </a:pPr>
-            <a:r>
-              <a:rPr>
-                <a:latin typeface="Courier"/>
-              </a:rPr>
-              <a:t>
-Call:
-glm(formula = mature ~ length, family = binomial, data = lizards_df)
-Coefficients:
-            Estimate Std. Error z value Pr(&gt;|z|)   
-(Intercept)  -6.6899     2.1401  -3.126  0.00177 **
-length        0.2503     0.0775   3.229  0.00124 **
----
-Signif. codes:  0 '***' 0.001 '**' 0.01 '*' 0.05 '.' 0.1 ' ' 1
-(Dispersion parameter for binomial family taken to be 1)
-    Null deviance: 60.176  on 43  degrees of freedom
-Residual deviance: 34.041  on 42  degrees of freedom
-AIC: 38.041
-Number of Fisher Scoring iterations: 6</a:t>
-            </a:r>
-          </a:p>
-          <a:p>
-            <a:pPr lvl="0" indent="0" marL="0">
-              <a:spcBef>
-                <a:spcPts val="3000"/>
-              </a:spcBef>
-              <a:buNone/>
-            </a:pPr>
-            <a:r>
-              <a:rPr b="1"/>
-              <a:t>Interpreting the Model Output</a:t>
-            </a:r>
-          </a:p>
-          <a:p>
-            <a:pPr lvl="0" indent="0" marL="0">
-              <a:spcBef>
-                <a:spcPts val="3000"/>
-              </a:spcBef>
-              <a:buNone/>
-            </a:pPr>
-            <a:r>
-              <a:rPr b="1"/>
-              <a:t>Coefficients:</a:t>
-            </a:r>
-          </a:p>
-          <a:p>
-            <a:pPr lvl="0"/>
-            <a:r>
-              <a:rPr b="1"/>
-              <a:t>Intercept (β₀)</a:t>
-            </a:r>
-            <a:r>
-              <a:rPr/>
-              <a:t>: -5.5847 - The log-odds when length = 0</a:t>
-            </a:r>
-          </a:p>
-          <a:p>
-            <a:pPr lvl="0"/>
-            <a:r>
-              <a:rPr b="1"/>
-              <a:t>Slope (β₁)</a:t>
-            </a:r>
-            <a:r>
-              <a:rPr/>
-              <a:t>: 0.2503 - Change in log-odds for each 1 cm increase in length</a:t>
-            </a:r>
-          </a:p>
-          <a:p>
-            <a:pPr lvl="0" indent="0" marL="0">
-              <a:spcBef>
-                <a:spcPts val="3000"/>
-              </a:spcBef>
-              <a:buNone/>
-            </a:pPr>
-            <a:r>
-              <a:rPr b="1"/>
-              <a:t>P-values:</a:t>
-            </a:r>
-          </a:p>
-          <a:p>
-            <a:pPr lvl="0"/>
-            <a:r>
-              <a:rPr/>
-              <a:t>Both coefficients are significant (p &lt; 0.05)</a:t>
-            </a:r>
-          </a:p>
-          <a:p>
-            <a:pPr lvl="0"/>
-            <a:r>
-              <a:rPr/>
-              <a:t>We reject the null hypothesis that β₁ = 0</a:t>
-            </a:r>
-          </a:p>
-          <a:p>
-            <a:pPr lvl="0"/>
-            <a:r>
-              <a:rPr/>
-              <a:t>There IS a relationship between length and sexual maturity</a:t>
-            </a:r>
-          </a:p>
-          <a:p>
-            <a:pPr lvl="0" indent="0" marL="0">
-              <a:spcBef>
-                <a:spcPts val="3000"/>
-              </a:spcBef>
-              <a:buNone/>
-            </a:pPr>
-            <a:r>
-              <a:rPr b="1"/>
-              <a:t>Understanding the Slope:</a:t>
-            </a:r>
-          </a:p>
-          <a:p>
-            <a:pPr lvl="0" indent="0" marL="0">
-              <a:buNone/>
-            </a:pPr>
-            <a:r>
-              <a:rPr/>
-              <a:t>The positive slope (0.2503) indicates: - Longer lizards are more likely to be sexually mature - For each 1 cm increase in length, the log-odds of maturity increase by 0.2503</a:t>
+              <a:rPr>
+                <a:solidFill>
+                  <a:srgbClr val="5E5E5E"/>
+                </a:solidFill>
+                <a:latin typeface="Courier"/>
+              </a:rPr>
+              <a:t># Load the lizard dataset</a:t>
+            </a:r>
+            <a:br/>
+            <a:r>
+              <a:rPr>
+                <a:solidFill>
+                  <a:srgbClr val="003B4F"/>
+                </a:solidFill>
+                <a:latin typeface="Courier"/>
+              </a:rPr>
+              <a:t>lizards_df &lt;- </a:t>
+            </a:r>
+            <a:r>
+              <a:rPr>
+                <a:solidFill>
+                  <a:srgbClr val="4758AB"/>
+                </a:solidFill>
+                <a:latin typeface="Courier"/>
+              </a:rPr>
+              <a:t>read.csv</a:t>
+            </a:r>
+            <a:r>
+              <a:rPr>
+                <a:solidFill>
+                  <a:srgbClr val="003B4F"/>
+                </a:solidFill>
+                <a:latin typeface="Courier"/>
+              </a:rPr>
+              <a:t>(</a:t>
+            </a:r>
+            <a:r>
+              <a:rPr>
+                <a:solidFill>
+                  <a:srgbClr val="20794D"/>
+                </a:solidFill>
+                <a:latin typeface="Courier"/>
+              </a:rPr>
+              <a:t>"data/lizards.csv"</a:t>
+            </a:r>
+            <a:r>
+              <a:rPr>
+                <a:solidFill>
+                  <a:srgbClr val="003B4F"/>
+                </a:solidFill>
+                <a:latin typeface="Courier"/>
+              </a:rPr>
+              <a:t>) </a:t>
+            </a:r>
+            <a:r>
+              <a:rPr>
+                <a:solidFill>
+                  <a:srgbClr val="5E5E5E"/>
+                </a:solidFill>
+                <a:latin typeface="Courier"/>
+              </a:rPr>
+              <a:t>%&gt;%</a:t>
+            </a:r>
+            <a:r>
+              <a:rPr>
+                <a:solidFill>
+                  <a:srgbClr val="003B4F"/>
+                </a:solidFill>
+                <a:latin typeface="Courier"/>
+              </a:rPr>
+              <a:t> </a:t>
+            </a:r>
+            <a:br/>
+            <a:r>
+              <a:rPr>
+                <a:solidFill>
+                  <a:srgbClr val="003B4F"/>
+                </a:solidFill>
+                <a:latin typeface="Courier"/>
+              </a:rPr>
+              <a:t>  </a:t>
+            </a:r>
+            <a:r>
+              <a:rPr>
+                <a:solidFill>
+                  <a:srgbClr val="4758AB"/>
+                </a:solidFill>
+                <a:latin typeface="Courier"/>
+              </a:rPr>
+              <a:t>clean_names</a:t>
+            </a:r>
+            <a:r>
+              <a:rPr>
+                <a:solidFill>
+                  <a:srgbClr val="003B4F"/>
+                </a:solidFill>
+                <a:latin typeface="Courier"/>
+              </a:rPr>
+              <a:t>()</a:t>
+            </a:r>
+            <a:br/>
+            <a:br/>
+            <a:r>
+              <a:rPr>
+                <a:solidFill>
+                  <a:srgbClr val="5E5E5E"/>
+                </a:solidFill>
+                <a:latin typeface="Courier"/>
+              </a:rPr>
+              <a:t># First few rows</a:t>
+            </a:r>
+            <a:br/>
+            <a:r>
+              <a:rPr>
+                <a:solidFill>
+                  <a:srgbClr val="4758AB"/>
+                </a:solidFill>
+                <a:latin typeface="Courier"/>
+              </a:rPr>
+              <a:t>head</a:t>
+            </a:r>
+            <a:r>
+              <a:rPr>
+                <a:solidFill>
+                  <a:srgbClr val="003B4F"/>
+                </a:solidFill>
+                <a:latin typeface="Courier"/>
+              </a:rPr>
+              <a:t>(lizards_df)</a:t>
+            </a:r>
+            <a:br/>
+            <a:r>
+              <a:rPr i="1">
+                <a:solidFill>
+                  <a:srgbClr val="5E5E5E"/>
+                </a:solidFill>
+                <a:latin typeface="Courier"/>
+              </a:rPr>
+              <a:t>##   length mature</a:t>
+            </a:r>
+            <a:br/>
+            <a:r>
+              <a:rPr i="1">
+                <a:solidFill>
+                  <a:srgbClr val="5E5E5E"/>
+                </a:solidFill>
+                <a:latin typeface="Courier"/>
+              </a:rPr>
+              <a:t>## 1   10.2      0</a:t>
+            </a:r>
+            <a:br/>
+            <a:r>
+              <a:rPr i="1">
+                <a:solidFill>
+                  <a:srgbClr val="5E5E5E"/>
+                </a:solidFill>
+                <a:latin typeface="Courier"/>
+              </a:rPr>
+              <a:t>## 2   10.4      0</a:t>
+            </a:r>
+            <a:br/>
+            <a:r>
+              <a:rPr i="1">
+                <a:solidFill>
+                  <a:srgbClr val="5E5E5E"/>
+                </a:solidFill>
+                <a:latin typeface="Courier"/>
+              </a:rPr>
+              <a:t>## 3   11.8      0</a:t>
+            </a:r>
+            <a:br/>
+            <a:r>
+              <a:rPr i="1">
+                <a:solidFill>
+                  <a:srgbClr val="5E5E5E"/>
+                </a:solidFill>
+                <a:latin typeface="Courier"/>
+              </a:rPr>
+              <a:t>## 4   12.3      0</a:t>
+            </a:r>
+            <a:br/>
+            <a:r>
+              <a:rPr i="1">
+                <a:solidFill>
+                  <a:srgbClr val="5E5E5E"/>
+                </a:solidFill>
+                <a:latin typeface="Courier"/>
+              </a:rPr>
+              <a:t>## 5   13.8      0</a:t>
+            </a:r>
+            <a:br/>
+            <a:r>
+              <a:rPr i="1">
+                <a:solidFill>
+                  <a:srgbClr val="5E5E5E"/>
+                </a:solidFill>
+                <a:latin typeface="Courier"/>
+              </a:rPr>
+              <a:t>## 6   16.9      0</a:t>
             </a:r>
           </a:p>
         </p:txBody>
@@ -4798,56 +8821,7 @@
             </a:pPr>
             <a:r>
               <a:rPr/>
-              <a:t>Step 4: Convert Log-Odds to Odds</a:t>
-            </a:r>
-          </a:p>
-        </p:txBody>
-      </p:sp>
-      <p:sp>
-        <p:nvSpPr>
-          <p:cNvPr id="3" name="Content Placeholder 2"/>
-          <p:cNvSpPr>
-            <a:spLocks noGrp="1"/>
-          </p:cNvSpPr>
-          <p:nvPr>
-            <p:ph idx="1"/>
-          </p:nvPr>
-        </p:nvSpPr>
-        <p:spPr/>
-        <p:txBody>
-          <a:bodyPr/>
-          <a:lstStyle/>
-          <a:p>
-            <a:pPr lvl="0" indent="0" marL="0">
-              <a:spcBef>
-                <a:spcPts val="3000"/>
-              </a:spcBef>
-              <a:buNone/>
-            </a:pPr>
-            <a:r>
-              <a:rPr b="1"/>
-              <a:t>Making the Results More Interpretable</a:t>
-            </a:r>
-          </a:p>
-          <a:p>
-            <a:pPr lvl="0" indent="0" marL="0">
-              <a:buNone/>
-            </a:pPr>
-            <a:r>
-              <a:rPr/>
-              <a:t>Log-odds are hard to interpret. Let’s convert to odds:</a:t>
-            </a:r>
-          </a:p>
-          <a:p>
-            <a:pPr lvl="0" indent="0">
-              <a:buNone/>
-            </a:pPr>
-            <a:r>
-              <a:rPr>
-                <a:latin typeface="Courier"/>
-              </a:rPr>
-              <a:t>  length 
-1.284388 </a:t>
+              <a:t>Step 2: Initial Data Visualization</a:t>
             </a:r>
           </a:p>
         </p:txBody>
@@ -4898,8 +8872,8 @@
               <a:buNone/>
             </a:pPr>
             <a:r>
-              <a:rPr/>
-              <a:t>Step 5: Create the Logistic Regression Plot</a:t>
+              <a:rPr b="1"/>
+              <a:t>Creating a Boxplot</a:t>
             </a:r>
           </a:p>
         </p:txBody>
@@ -4920,21 +8894,454 @@
           <a:lstStyle/>
           <a:p>
             <a:pPr lvl="0" indent="0" marL="0">
-              <a:spcBef>
-                <a:spcPts val="3000"/>
-              </a:spcBef>
               <a:buNone/>
             </a:pPr>
             <a:r>
-              <a:rPr b="1"/>
-              <a:t>Visualizing the Probability Curve</a:t>
+              <a:rPr/>
+              <a:t>Let’s visualize how body length differs between sexually mature and immature lizards:</a:t>
+            </a:r>
+          </a:p>
+          <a:p>
+            <a:pPr lvl="0" indent="0">
+              <a:buNone/>
+            </a:pPr>
+            <a:r>
+              <a:rPr>
+                <a:solidFill>
+                  <a:srgbClr val="5E5E5E"/>
+                </a:solidFill>
+                <a:latin typeface="Courier"/>
+              </a:rPr>
+              <a:t># Create boxplot showing length by maturity status</a:t>
+            </a:r>
+            <a:br/>
+            <a:r>
+              <a:rPr>
+                <a:solidFill>
+                  <a:srgbClr val="003B4F"/>
+                </a:solidFill>
+                <a:latin typeface="Courier"/>
+              </a:rPr>
+              <a:t>maturity_boxplot &lt;- </a:t>
+            </a:r>
+            <a:r>
+              <a:rPr>
+                <a:solidFill>
+                  <a:srgbClr val="4758AB"/>
+                </a:solidFill>
+                <a:latin typeface="Courier"/>
+              </a:rPr>
+              <a:t>ggplot</a:t>
+            </a:r>
+            <a:r>
+              <a:rPr>
+                <a:solidFill>
+                  <a:srgbClr val="003B4F"/>
+                </a:solidFill>
+                <a:latin typeface="Courier"/>
+              </a:rPr>
+              <a:t>(lizards_df, </a:t>
+            </a:r>
+            <a:r>
+              <a:rPr>
+                <a:solidFill>
+                  <a:srgbClr val="4758AB"/>
+                </a:solidFill>
+                <a:latin typeface="Courier"/>
+              </a:rPr>
+              <a:t>aes</a:t>
+            </a:r>
+            <a:r>
+              <a:rPr>
+                <a:solidFill>
+                  <a:srgbClr val="003B4F"/>
+                </a:solidFill>
+                <a:latin typeface="Courier"/>
+              </a:rPr>
+              <a:t>(</a:t>
+            </a:r>
+            <a:r>
+              <a:rPr>
+                <a:solidFill>
+                  <a:srgbClr val="657422"/>
+                </a:solidFill>
+                <a:latin typeface="Courier"/>
+              </a:rPr>
+              <a:t>x =</a:t>
+            </a:r>
+            <a:r>
+              <a:rPr>
+                <a:solidFill>
+                  <a:srgbClr val="003B4F"/>
+                </a:solidFill>
+                <a:latin typeface="Courier"/>
+              </a:rPr>
+              <a:t> </a:t>
+            </a:r>
+            <a:r>
+              <a:rPr>
+                <a:solidFill>
+                  <a:srgbClr val="4758AB"/>
+                </a:solidFill>
+                <a:latin typeface="Courier"/>
+              </a:rPr>
+              <a:t>factor</a:t>
+            </a:r>
+            <a:r>
+              <a:rPr>
+                <a:solidFill>
+                  <a:srgbClr val="003B4F"/>
+                </a:solidFill>
+                <a:latin typeface="Courier"/>
+              </a:rPr>
+              <a:t>(mature), </a:t>
+            </a:r>
+            <a:r>
+              <a:rPr>
+                <a:solidFill>
+                  <a:srgbClr val="657422"/>
+                </a:solidFill>
+                <a:latin typeface="Courier"/>
+              </a:rPr>
+              <a:t>y =</a:t>
+            </a:r>
+            <a:r>
+              <a:rPr>
+                <a:solidFill>
+                  <a:srgbClr val="003B4F"/>
+                </a:solidFill>
+                <a:latin typeface="Courier"/>
+              </a:rPr>
+              <a:t> length)) </a:t>
+            </a:r>
+            <a:r>
+              <a:rPr>
+                <a:solidFill>
+                  <a:srgbClr val="5E5E5E"/>
+                </a:solidFill>
+                <a:latin typeface="Courier"/>
+              </a:rPr>
+              <a:t>+</a:t>
+            </a:r>
+            <a:br/>
+            <a:r>
+              <a:rPr>
+                <a:solidFill>
+                  <a:srgbClr val="003B4F"/>
+                </a:solidFill>
+                <a:latin typeface="Courier"/>
+              </a:rPr>
+              <a:t>  </a:t>
+            </a:r>
+            <a:r>
+              <a:rPr>
+                <a:solidFill>
+                  <a:srgbClr val="4758AB"/>
+                </a:solidFill>
+                <a:latin typeface="Courier"/>
+              </a:rPr>
+              <a:t>geom_boxplot</a:t>
+            </a:r>
+            <a:r>
+              <a:rPr>
+                <a:solidFill>
+                  <a:srgbClr val="003B4F"/>
+                </a:solidFill>
+                <a:latin typeface="Courier"/>
+              </a:rPr>
+              <a:t>(</a:t>
+            </a:r>
+            <a:r>
+              <a:rPr>
+                <a:solidFill>
+                  <a:srgbClr val="657422"/>
+                </a:solidFill>
+                <a:latin typeface="Courier"/>
+              </a:rPr>
+              <a:t>fill =</a:t>
+            </a:r>
+            <a:r>
+              <a:rPr>
+                <a:solidFill>
+                  <a:srgbClr val="003B4F"/>
+                </a:solidFill>
+                <a:latin typeface="Courier"/>
+              </a:rPr>
+              <a:t> </a:t>
+            </a:r>
+            <a:r>
+              <a:rPr>
+                <a:solidFill>
+                  <a:srgbClr val="4758AB"/>
+                </a:solidFill>
+                <a:latin typeface="Courier"/>
+              </a:rPr>
+              <a:t>c</a:t>
+            </a:r>
+            <a:r>
+              <a:rPr>
+                <a:solidFill>
+                  <a:srgbClr val="003B4F"/>
+                </a:solidFill>
+                <a:latin typeface="Courier"/>
+              </a:rPr>
+              <a:t>(</a:t>
+            </a:r>
+            <a:r>
+              <a:rPr>
+                <a:solidFill>
+                  <a:srgbClr val="20794D"/>
+                </a:solidFill>
+                <a:latin typeface="Courier"/>
+              </a:rPr>
+              <a:t>"lightblue"</a:t>
+            </a:r>
+            <a:r>
+              <a:rPr>
+                <a:solidFill>
+                  <a:srgbClr val="003B4F"/>
+                </a:solidFill>
+                <a:latin typeface="Courier"/>
+              </a:rPr>
+              <a:t>, </a:t>
+            </a:r>
+            <a:r>
+              <a:rPr>
+                <a:solidFill>
+                  <a:srgbClr val="20794D"/>
+                </a:solidFill>
+                <a:latin typeface="Courier"/>
+              </a:rPr>
+              <a:t>"lightcoral"</a:t>
+            </a:r>
+            <a:r>
+              <a:rPr>
+                <a:solidFill>
+                  <a:srgbClr val="003B4F"/>
+                </a:solidFill>
+                <a:latin typeface="Courier"/>
+              </a:rPr>
+              <a:t>)) </a:t>
+            </a:r>
+            <a:r>
+              <a:rPr>
+                <a:solidFill>
+                  <a:srgbClr val="5E5E5E"/>
+                </a:solidFill>
+                <a:latin typeface="Courier"/>
+              </a:rPr>
+              <a:t>+</a:t>
+            </a:r>
+            <a:br/>
+            <a:r>
+              <a:rPr>
+                <a:solidFill>
+                  <a:srgbClr val="003B4F"/>
+                </a:solidFill>
+                <a:latin typeface="Courier"/>
+              </a:rPr>
+              <a:t>  </a:t>
+            </a:r>
+            <a:r>
+              <a:rPr>
+                <a:solidFill>
+                  <a:srgbClr val="4758AB"/>
+                </a:solidFill>
+                <a:latin typeface="Courier"/>
+              </a:rPr>
+              <a:t>labs</a:t>
+            </a:r>
+            <a:r>
+              <a:rPr>
+                <a:solidFill>
+                  <a:srgbClr val="003B4F"/>
+                </a:solidFill>
+                <a:latin typeface="Courier"/>
+              </a:rPr>
+              <a:t>(</a:t>
+            </a:r>
+            <a:r>
+              <a:rPr>
+                <a:solidFill>
+                  <a:srgbClr val="657422"/>
+                </a:solidFill>
+                <a:latin typeface="Courier"/>
+              </a:rPr>
+              <a:t>title =</a:t>
+            </a:r>
+            <a:r>
+              <a:rPr>
+                <a:solidFill>
+                  <a:srgbClr val="003B4F"/>
+                </a:solidFill>
+                <a:latin typeface="Courier"/>
+              </a:rPr>
+              <a:t> </a:t>
+            </a:r>
+            <a:r>
+              <a:rPr>
+                <a:solidFill>
+                  <a:srgbClr val="20794D"/>
+                </a:solidFill>
+                <a:latin typeface="Courier"/>
+              </a:rPr>
+              <a:t>"Lizard Body Length by Sexual Maturity Status"</a:t>
+            </a:r>
+            <a:r>
+              <a:rPr>
+                <a:solidFill>
+                  <a:srgbClr val="003B4F"/>
+                </a:solidFill>
+                <a:latin typeface="Courier"/>
+              </a:rPr>
+              <a:t>,</a:t>
+            </a:r>
+            <a:br/>
+            <a:r>
+              <a:rPr>
+                <a:solidFill>
+                  <a:srgbClr val="003B4F"/>
+                </a:solidFill>
+                <a:latin typeface="Courier"/>
+              </a:rPr>
+              <a:t>       </a:t>
+            </a:r>
+            <a:r>
+              <a:rPr>
+                <a:solidFill>
+                  <a:srgbClr val="657422"/>
+                </a:solidFill>
+                <a:latin typeface="Courier"/>
+              </a:rPr>
+              <a:t>x =</a:t>
+            </a:r>
+            <a:r>
+              <a:rPr>
+                <a:solidFill>
+                  <a:srgbClr val="003B4F"/>
+                </a:solidFill>
+                <a:latin typeface="Courier"/>
+              </a:rPr>
+              <a:t> </a:t>
+            </a:r>
+            <a:r>
+              <a:rPr>
+                <a:solidFill>
+                  <a:srgbClr val="20794D"/>
+                </a:solidFill>
+                <a:latin typeface="Courier"/>
+              </a:rPr>
+              <a:t>"Sexual Maturity (0 = Immature, 1 = Mature)"</a:t>
+            </a:r>
+            <a:r>
+              <a:rPr>
+                <a:solidFill>
+                  <a:srgbClr val="003B4F"/>
+                </a:solidFill>
+                <a:latin typeface="Courier"/>
+              </a:rPr>
+              <a:t>,</a:t>
+            </a:r>
+            <a:br/>
+            <a:r>
+              <a:rPr>
+                <a:solidFill>
+                  <a:srgbClr val="003B4F"/>
+                </a:solidFill>
+                <a:latin typeface="Courier"/>
+              </a:rPr>
+              <a:t>       </a:t>
+            </a:r>
+            <a:r>
+              <a:rPr>
+                <a:solidFill>
+                  <a:srgbClr val="657422"/>
+                </a:solidFill>
+                <a:latin typeface="Courier"/>
+              </a:rPr>
+              <a:t>y =</a:t>
+            </a:r>
+            <a:r>
+              <a:rPr>
+                <a:solidFill>
+                  <a:srgbClr val="003B4F"/>
+                </a:solidFill>
+                <a:latin typeface="Courier"/>
+              </a:rPr>
+              <a:t> </a:t>
+            </a:r>
+            <a:r>
+              <a:rPr>
+                <a:solidFill>
+                  <a:srgbClr val="20794D"/>
+                </a:solidFill>
+                <a:latin typeface="Courier"/>
+              </a:rPr>
+              <a:t>"Body Length (cm)"</a:t>
+            </a:r>
+            <a:r>
+              <a:rPr>
+                <a:solidFill>
+                  <a:srgbClr val="003B4F"/>
+                </a:solidFill>
+                <a:latin typeface="Courier"/>
+              </a:rPr>
+              <a:t>) </a:t>
+            </a:r>
+            <a:r>
+              <a:rPr>
+                <a:solidFill>
+                  <a:srgbClr val="5E5E5E"/>
+                </a:solidFill>
+                <a:latin typeface="Courier"/>
+              </a:rPr>
+              <a:t>+</a:t>
+            </a:r>
+            <a:br/>
+            <a:r>
+              <a:rPr>
+                <a:solidFill>
+                  <a:srgbClr val="003B4F"/>
+                </a:solidFill>
+                <a:latin typeface="Courier"/>
+              </a:rPr>
+              <a:t>  </a:t>
+            </a:r>
+            <a:r>
+              <a:rPr>
+                <a:solidFill>
+                  <a:srgbClr val="4758AB"/>
+                </a:solidFill>
+                <a:latin typeface="Courier"/>
+              </a:rPr>
+              <a:t>theme_minimal</a:t>
+            </a:r>
+            <a:r>
+              <a:rPr>
+                <a:solidFill>
+                  <a:srgbClr val="003B4F"/>
+                </a:solidFill>
+                <a:latin typeface="Courier"/>
+              </a:rPr>
+              <a:t>()</a:t>
+            </a:r>
+            <a:br/>
+            <a:br/>
+            <a:r>
+              <a:rPr>
+                <a:solidFill>
+                  <a:srgbClr val="003B4F"/>
+                </a:solidFill>
+                <a:latin typeface="Courier"/>
+              </a:rPr>
+              <a:t>maturity_boxplot</a:t>
             </a:r>
           </a:p>
         </p:txBody>
       </p:sp>
       <p:pic>
         <p:nvPicPr>
-          <p:cNvPr descr="review_lecture_files/figure-pptx/logistic_regression_plot-1.png" id="0" name="Picture 1"/>
+          <p:cNvPr descr="review_lecture_files/figure-pptx/initial_boxplot-1.png" id="0" name="Picture 1"/>
           <p:cNvPicPr>
             <a:picLocks noGrp="1" noChangeAspect="1"/>
           </p:cNvPicPr>
@@ -4948,8 +9355,8 @@
         </p:blipFill>
         <p:spPr bwMode="auto">
           <a:xfrm>
-            <a:off x="3657600" y="1244600"/>
-            <a:ext cx="5232400" cy="3225800"/>
+            <a:off x="4368800" y="952500"/>
+            <a:ext cx="3797300" cy="3797300"/>
           </a:xfrm>
           <a:prstGeom prst="rect">
             <a:avLst/>
@@ -4986,56 +9393,74 @@
       </p:grpSpPr>
       <p:sp>
         <p:nvSpPr>
-          <p:cNvPr id="3" name="Content Placeholder 2"/>
-          <p:cNvSpPr>
-            <a:spLocks noGrp="1"/>
-          </p:cNvSpPr>
-          <p:nvPr>
-            <p:ph idx="1"/>
-          </p:nvPr>
-        </p:nvSpPr>
-        <p:spPr/>
+          <p:cNvPr id="2" name="Title 1"/>
+          <p:cNvSpPr>
+            <a:spLocks noGrp="1"/>
+          </p:cNvSpPr>
+          <p:nvPr>
+            <p:ph type="title"/>
+          </p:nvPr>
+        </p:nvSpPr>
+        <p:spPr>
+          <a:xfrm>
+            <a:off x="0" y="0"/>
+            <a:ext cx="9144000" cy="582780"/>
+          </a:xfrm>
+        </p:spPr>
         <p:txBody>
           <a:bodyPr/>
           <a:lstStyle/>
           <a:p>
             <a:pPr lvl="0" indent="0" marL="0">
-              <a:spcBef>
-                <a:spcPts val="3000"/>
-              </a:spcBef>
               <a:buNone/>
             </a:pPr>
             <a:r>
               <a:rPr b="1"/>
-              <a:t>What the S-curve tells us:</a:t>
-            </a:r>
-          </a:p>
+              <a:t>What do we see?</a:t>
+            </a:r>
+          </a:p>
+        </p:txBody>
+      </p:sp>
+      <p:sp>
+        <p:nvSpPr>
+          <p:cNvPr id="3" name="Content Placeholder 2"/>
+          <p:cNvSpPr>
+            <a:spLocks noGrp="1"/>
+          </p:cNvSpPr>
+          <p:nvPr>
+            <p:ph idx="1"/>
+          </p:nvPr>
+        </p:nvSpPr>
+        <p:spPr/>
+        <p:txBody>
+          <a:bodyPr/>
+          <a:lstStyle/>
           <a:p>
             <a:pPr lvl="0"/>
             <a:r>
               <a:rPr/>
-              <a:t>The red line shows how probability changes with length</a:t>
+              <a:t>There appears to be a relationship between size and sexual maturity</a:t>
             </a:r>
           </a:p>
           <a:p>
             <a:pPr lvl="0"/>
             <a:r>
               <a:rPr/>
-              <a:t>Small lizards (&lt;20 cm) have very low probability of being mature</a:t>
+              <a:t>Mature lizards tend to be longer than immature ones</a:t>
             </a:r>
           </a:p>
           <a:p>
             <a:pPr lvl="0"/>
             <a:r>
               <a:rPr/>
-              <a:t>Large lizards (&gt;40 cm) have very high probability of being mature</a:t>
+              <a:t>But there’s overlap - not a perfect separation</a:t>
             </a:r>
           </a:p>
           <a:p>
             <a:pPr lvl="0"/>
             <a:r>
               <a:rPr/>
-              <a:t>The steepest change occurs around 25-30 cm</a:t>
+              <a:t>This suggests logistic regression might be appropriate</a:t>
             </a:r>
           </a:p>
         </p:txBody>
